--- a/docs/Kenneth Copas - Capstone Presentation.pptx
+++ b/docs/Kenneth Copas - Capstone Presentation.pptx
@@ -155,7 +155,7 @@
 <file path=ppt/revisionInfo.xml><?xml version="1.0" encoding="utf-8"?>
 <p1510:revInfo xmlns:a="http://schemas.openxmlformats.org/drawingml/2006/main" xmlns:r="http://schemas.openxmlformats.org/officeDocument/2006/relationships" xmlns:p1510="http://schemas.microsoft.com/office/powerpoint/2015/10/main">
   <p1510:revLst>
-    <p1510:client id="{C033EAB2-3B57-40FC-AFA2-E72F0E9566D5}" v="498" dt="2025-06-06T12:41:57.468"/>
+    <p1510:client id="{C033EAB2-3B57-40FC-AFA2-E72F0E9566D5}" v="623" dt="2025-06-06T20:10:36.014"/>
   </p1510:revLst>
 </p1510:revInfo>
 </file>
@@ -1547,8 +1547,8 @@
   </pc:docChgLst>
   <pc:docChgLst>
     <pc:chgData name="Kenneth Copas" userId="acf87e8c-e0c4-48a9-850b-6aa06780f160" providerId="ADAL" clId="{C033EAB2-3B57-40FC-AFA2-E72F0E9566D5}"/>
-    <pc:docChg chg="undo custSel delSld modSld sldOrd modSection">
-      <pc:chgData name="Kenneth Copas" userId="acf87e8c-e0c4-48a9-850b-6aa06780f160" providerId="ADAL" clId="{C033EAB2-3B57-40FC-AFA2-E72F0E9566D5}" dt="2025-06-06T12:46:34.143" v="5320" actId="20577"/>
+    <pc:docChg chg="undo custSel addSld delSld modSld sldOrd modSection">
+      <pc:chgData name="Kenneth Copas" userId="acf87e8c-e0c4-48a9-850b-6aa06780f160" providerId="ADAL" clId="{C033EAB2-3B57-40FC-AFA2-E72F0E9566D5}" dt="2025-06-06T20:10:36.014" v="5696"/>
       <pc:docMkLst>
         <pc:docMk/>
       </pc:docMkLst>
@@ -1582,14 +1582,54 @@
           <pc:sldMk cId="3992357642" sldId="259"/>
         </pc:sldMkLst>
       </pc:sldChg>
-      <pc:sldChg chg="modSp mod modNotesTx">
-        <pc:chgData name="Kenneth Copas" userId="acf87e8c-e0c4-48a9-850b-6aa06780f160" providerId="ADAL" clId="{C033EAB2-3B57-40FC-AFA2-E72F0E9566D5}" dt="2025-06-06T12:41:58.478" v="5000"/>
+      <pc:sldChg chg="addSp delSp modSp mod addAnim delAnim modAnim modNotesTx">
+        <pc:chgData name="Kenneth Copas" userId="acf87e8c-e0c4-48a9-850b-6aa06780f160" providerId="ADAL" clId="{C033EAB2-3B57-40FC-AFA2-E72F0E9566D5}" dt="2025-06-06T20:10:36.014" v="5696"/>
         <pc:sldMkLst>
           <pc:docMk/>
           <pc:sldMk cId="1753993030" sldId="260"/>
         </pc:sldMkLst>
+        <pc:spChg chg="add del mod ord">
+          <ac:chgData name="Kenneth Copas" userId="acf87e8c-e0c4-48a9-850b-6aa06780f160" providerId="ADAL" clId="{C033EAB2-3B57-40FC-AFA2-E72F0E9566D5}" dt="2025-06-06T19:59:30.889" v="5638" actId="1076"/>
+          <ac:spMkLst>
+            <pc:docMk/>
+            <pc:sldMk cId="1753993030" sldId="260"/>
+            <ac:spMk id="3" creationId="{51045CD4-8996-A378-16A4-F0DF732F3DEB}"/>
+          </ac:spMkLst>
+        </pc:spChg>
+        <pc:spChg chg="add mod ord">
+          <ac:chgData name="Kenneth Copas" userId="acf87e8c-e0c4-48a9-850b-6aa06780f160" providerId="ADAL" clId="{C033EAB2-3B57-40FC-AFA2-E72F0E9566D5}" dt="2025-06-06T19:59:50.223" v="5649" actId="171"/>
+          <ac:spMkLst>
+            <pc:docMk/>
+            <pc:sldMk cId="1753993030" sldId="260"/>
+            <ac:spMk id="5" creationId="{4C6CDBE3-0E3D-96FD-9D08-EFF4DAD59F16}"/>
+          </ac:spMkLst>
+        </pc:spChg>
+        <pc:spChg chg="add del mod ord">
+          <ac:chgData name="Kenneth Copas" userId="acf87e8c-e0c4-48a9-850b-6aa06780f160" providerId="ADAL" clId="{C033EAB2-3B57-40FC-AFA2-E72F0E9566D5}" dt="2025-06-06T20:10:33.915" v="5694" actId="21"/>
+          <ac:spMkLst>
+            <pc:docMk/>
+            <pc:sldMk cId="1753993030" sldId="260"/>
+            <ac:spMk id="6" creationId="{51045CD4-8996-A378-16A4-F0DF732F3DEB}"/>
+          </ac:spMkLst>
+        </pc:spChg>
+        <pc:spChg chg="add del mod">
+          <ac:chgData name="Kenneth Copas" userId="acf87e8c-e0c4-48a9-850b-6aa06780f160" providerId="ADAL" clId="{C033EAB2-3B57-40FC-AFA2-E72F0E9566D5}" dt="2025-06-06T20:06:37.246" v="5677" actId="478"/>
+          <ac:spMkLst>
+            <pc:docMk/>
+            <pc:sldMk cId="1753993030" sldId="260"/>
+            <ac:spMk id="7" creationId="{5941870C-8251-39A3-2ED8-F394B51F190E}"/>
+          </ac:spMkLst>
+        </pc:spChg>
+        <pc:spChg chg="add mod">
+          <ac:chgData name="Kenneth Copas" userId="acf87e8c-e0c4-48a9-850b-6aa06780f160" providerId="ADAL" clId="{C033EAB2-3B57-40FC-AFA2-E72F0E9566D5}" dt="2025-06-06T20:10:35.458" v="5695"/>
+          <ac:spMkLst>
+            <pc:docMk/>
+            <pc:sldMk cId="1753993030" sldId="260"/>
+            <ac:spMk id="8" creationId="{51045CD4-8996-A378-16A4-F0DF732F3DEB}"/>
+          </ac:spMkLst>
+        </pc:spChg>
         <pc:graphicFrameChg chg="mod modGraphic">
-          <ac:chgData name="Kenneth Copas" userId="acf87e8c-e0c4-48a9-850b-6aa06780f160" providerId="ADAL" clId="{C033EAB2-3B57-40FC-AFA2-E72F0E9566D5}" dt="2025-06-06T12:29:26.924" v="4573" actId="20577"/>
+          <ac:chgData name="Kenneth Copas" userId="acf87e8c-e0c4-48a9-850b-6aa06780f160" providerId="ADAL" clId="{C033EAB2-3B57-40FC-AFA2-E72F0E9566D5}" dt="2025-06-06T19:59:31.019" v="5642"/>
           <ac:graphicFrameMkLst>
             <pc:docMk/>
             <pc:sldMk cId="1753993030" sldId="260"/>
@@ -1612,7 +1652,7 @@
         </pc:sldMkLst>
       </pc:sldChg>
       <pc:sldChg chg="delSp modSp ord modNotesTx">
-        <pc:chgData name="Kenneth Copas" userId="acf87e8c-e0c4-48a9-850b-6aa06780f160" providerId="ADAL" clId="{C033EAB2-3B57-40FC-AFA2-E72F0E9566D5}" dt="2025-06-06T12:38:47.786" v="4700" actId="20577"/>
+        <pc:chgData name="Kenneth Copas" userId="acf87e8c-e0c4-48a9-850b-6aa06780f160" providerId="ADAL" clId="{C033EAB2-3B57-40FC-AFA2-E72F0E9566D5}" dt="2025-06-06T15:40:28.437" v="5409" actId="20577"/>
         <pc:sldMkLst>
           <pc:docMk/>
           <pc:sldMk cId="3254621715" sldId="270"/>
@@ -1651,7 +1691,7 @@
         </pc:picChg>
       </pc:sldChg>
       <pc:sldChg chg="modSp mod modNotesTx">
-        <pc:chgData name="Kenneth Copas" userId="acf87e8c-e0c4-48a9-850b-6aa06780f160" providerId="ADAL" clId="{C033EAB2-3B57-40FC-AFA2-E72F0E9566D5}" dt="2025-06-06T12:38:26.067" v="4628" actId="20577"/>
+        <pc:chgData name="Kenneth Copas" userId="acf87e8c-e0c4-48a9-850b-6aa06780f160" providerId="ADAL" clId="{C033EAB2-3B57-40FC-AFA2-E72F0E9566D5}" dt="2025-06-06T15:40:36.761" v="5416" actId="20577"/>
         <pc:sldMkLst>
           <pc:docMk/>
           <pc:sldMk cId="2762418532" sldId="271"/>
@@ -1674,7 +1714,7 @@
         </pc:graphicFrameChg>
       </pc:sldChg>
       <pc:sldChg chg="modNotesTx">
-        <pc:chgData name="Kenneth Copas" userId="acf87e8c-e0c4-48a9-850b-6aa06780f160" providerId="ADAL" clId="{C033EAB2-3B57-40FC-AFA2-E72F0E9566D5}" dt="2025-06-06T12:46:34.143" v="5320" actId="20577"/>
+        <pc:chgData name="Kenneth Copas" userId="acf87e8c-e0c4-48a9-850b-6aa06780f160" providerId="ADAL" clId="{C033EAB2-3B57-40FC-AFA2-E72F0E9566D5}" dt="2025-06-06T15:39:25.147" v="5355" actId="20577"/>
         <pc:sldMkLst>
           <pc:docMk/>
           <pc:sldMk cId="2929353324" sldId="279"/>
@@ -1704,14 +1744,14 @@
         </pc:picChg>
       </pc:sldChg>
       <pc:sldChg chg="modNotesTx">
-        <pc:chgData name="Kenneth Copas" userId="acf87e8c-e0c4-48a9-850b-6aa06780f160" providerId="ADAL" clId="{C033EAB2-3B57-40FC-AFA2-E72F0E9566D5}" dt="2025-06-06T12:40:12.508" v="4818" actId="20577"/>
+        <pc:chgData name="Kenneth Copas" userId="acf87e8c-e0c4-48a9-850b-6aa06780f160" providerId="ADAL" clId="{C033EAB2-3B57-40FC-AFA2-E72F0E9566D5}" dt="2025-06-06T15:39:06.702" v="5340" actId="20577"/>
         <pc:sldMkLst>
           <pc:docMk/>
           <pc:sldMk cId="3501458890" sldId="285"/>
         </pc:sldMkLst>
       </pc:sldChg>
       <pc:sldChg chg="modSp modNotesTx">
-        <pc:chgData name="Kenneth Copas" userId="acf87e8c-e0c4-48a9-850b-6aa06780f160" providerId="ADAL" clId="{C033EAB2-3B57-40FC-AFA2-E72F0E9566D5}" dt="2025-06-06T12:39:31.989" v="4780" actId="20577"/>
+        <pc:chgData name="Kenneth Copas" userId="acf87e8c-e0c4-48a9-850b-6aa06780f160" providerId="ADAL" clId="{C033EAB2-3B57-40FC-AFA2-E72F0E9566D5}" dt="2025-06-06T15:38:53.308" v="5335" actId="20577"/>
         <pc:sldMkLst>
           <pc:docMk/>
           <pc:sldMk cId="3203667889" sldId="286"/>
@@ -1726,14 +1766,14 @@
         </pc:graphicFrameChg>
       </pc:sldChg>
       <pc:sldChg chg="modNotesTx">
-        <pc:chgData name="Kenneth Copas" userId="acf87e8c-e0c4-48a9-850b-6aa06780f160" providerId="ADAL" clId="{C033EAB2-3B57-40FC-AFA2-E72F0E9566D5}" dt="2025-06-06T12:40:24.266" v="4851" actId="20577"/>
+        <pc:chgData name="Kenneth Copas" userId="acf87e8c-e0c4-48a9-850b-6aa06780f160" providerId="ADAL" clId="{C033EAB2-3B57-40FC-AFA2-E72F0E9566D5}" dt="2025-06-06T15:39:12.457" v="5345" actId="20577"/>
         <pc:sldMkLst>
           <pc:docMk/>
           <pc:sldMk cId="584810815" sldId="287"/>
         </pc:sldMkLst>
       </pc:sldChg>
       <pc:sldChg chg="modNotesTx">
-        <pc:chgData name="Kenneth Copas" userId="acf87e8c-e0c4-48a9-850b-6aa06780f160" providerId="ADAL" clId="{C033EAB2-3B57-40FC-AFA2-E72F0E9566D5}" dt="2025-06-06T12:43:31.221" v="5260" actId="20577"/>
+        <pc:chgData name="Kenneth Copas" userId="acf87e8c-e0c4-48a9-850b-6aa06780f160" providerId="ADAL" clId="{C033EAB2-3B57-40FC-AFA2-E72F0E9566D5}" dt="2025-06-06T15:39:18.444" v="5350" actId="20577"/>
         <pc:sldMkLst>
           <pc:docMk/>
           <pc:sldMk cId="433942857" sldId="288"/>
@@ -1755,7 +1795,7 @@
         </pc:picChg>
       </pc:sldChg>
       <pc:sldChg chg="addSp modSp modNotesTx">
-        <pc:chgData name="Kenneth Copas" userId="acf87e8c-e0c4-48a9-850b-6aa06780f160" providerId="ADAL" clId="{C033EAB2-3B57-40FC-AFA2-E72F0E9566D5}" dt="2025-06-06T12:38:36.788" v="4656" actId="20577"/>
+        <pc:chgData name="Kenneth Copas" userId="acf87e8c-e0c4-48a9-850b-6aa06780f160" providerId="ADAL" clId="{C033EAB2-3B57-40FC-AFA2-E72F0E9566D5}" dt="2025-06-06T15:38:41.181" v="5330" actId="20577"/>
         <pc:sldMkLst>
           <pc:docMk/>
           <pc:sldMk cId="528160161" sldId="292"/>
@@ -1960,6 +2000,28 @@
           </ac:picMkLst>
         </pc:picChg>
       </pc:sldChg>
+      <pc:sldChg chg="modSp add del mod modTransition">
+        <pc:chgData name="Kenneth Copas" userId="acf87e8c-e0c4-48a9-850b-6aa06780f160" providerId="ADAL" clId="{C033EAB2-3B57-40FC-AFA2-E72F0E9566D5}" dt="2025-06-06T20:04:59.980" v="5670" actId="47"/>
+        <pc:sldMkLst>
+          <pc:docMk/>
+          <pc:sldMk cId="859685175" sldId="294"/>
+        </pc:sldMkLst>
+        <pc:spChg chg="mod">
+          <ac:chgData name="Kenneth Copas" userId="acf87e8c-e0c4-48a9-850b-6aa06780f160" providerId="ADAL" clId="{C033EAB2-3B57-40FC-AFA2-E72F0E9566D5}" dt="2025-06-06T20:04:34.063" v="5668" actId="1076"/>
+          <ac:spMkLst>
+            <pc:docMk/>
+            <pc:sldMk cId="859685175" sldId="294"/>
+            <ac:spMk id="6" creationId="{0EA1DA6F-EDCE-2F14-7300-0E6D7413FC94}"/>
+          </ac:spMkLst>
+        </pc:spChg>
+      </pc:sldChg>
+      <pc:sldChg chg="add del">
+        <pc:chgData name="Kenneth Copas" userId="acf87e8c-e0c4-48a9-850b-6aa06780f160" providerId="ADAL" clId="{C033EAB2-3B57-40FC-AFA2-E72F0E9566D5}" dt="2025-06-06T20:04:07.728" v="5666" actId="47"/>
+        <pc:sldMkLst>
+          <pc:docMk/>
+          <pc:sldMk cId="3496513608" sldId="294"/>
+        </pc:sldMkLst>
+      </pc:sldChg>
     </pc:docChg>
   </pc:docChgLst>
 </pc:chgInfo>
@@ -5829,14 +5891,14 @@
         <a:lstStyle/>
         <a:p>
           <a:r>
-            <a:rPr lang="en-US" b="1" i="0" baseline="0" dirty="0">
+            <a:rPr lang="en-US" b="1" i="0" baseline="0">
               <a:solidFill>
                 <a:srgbClr val="FFFFFF"/>
               </a:solidFill>
             </a:rPr>
             <a:t>Before Apprenticeship</a:t>
           </a:r>
-          <a:endParaRPr lang="en-US" dirty="0">
+          <a:endParaRPr lang="en-US">
             <a:solidFill>
               <a:srgbClr val="FFFFFF"/>
             </a:solidFill>
@@ -5874,10 +5936,10 @@
         <a:lstStyle/>
         <a:p>
           <a:r>
-            <a:rPr lang="en-US" i="1" dirty="0"/>
+            <a:rPr lang="en-US" i="1"/>
             <a:t>Software Engineering (JavaScript, HTML, CSS, Java, Python)</a:t>
           </a:r>
-          <a:endParaRPr lang="en-US" dirty="0"/>
+          <a:endParaRPr lang="en-US"/>
         </a:p>
       </dgm:t>
     </dgm:pt>
@@ -5911,7 +5973,7 @@
         <a:lstStyle/>
         <a:p>
           <a:r>
-            <a:rPr lang="en-US" i="1" dirty="0"/>
+            <a:rPr lang="en-US" i="1"/>
             <a:t>Object-Oriented Programming, Dynamic Programming</a:t>
           </a:r>
         </a:p>
@@ -5947,10 +6009,10 @@
         <a:lstStyle/>
         <a:p>
           <a:r>
-            <a:rPr lang="en-US" b="1" dirty="0"/>
+            <a:rPr lang="en-US" b="1"/>
             <a:t>During Apprenticeship</a:t>
           </a:r>
-          <a:endParaRPr lang="en-US" dirty="0"/>
+          <a:endParaRPr lang="en-US"/>
         </a:p>
       </dgm:t>
     </dgm:pt>
@@ -5983,7 +6045,7 @@
         <a:bodyPr/>
         <a:lstStyle/>
         <a:p>
-          <a:endParaRPr lang="en-US" dirty="0"/>
+          <a:endParaRPr lang="en-US"/>
         </a:p>
       </dgm:t>
     </dgm:pt>
@@ -6017,10 +6079,10 @@
         <a:lstStyle/>
         <a:p>
           <a:r>
-            <a:rPr lang="en-US" b="1" dirty="0"/>
+            <a:rPr lang="en-US" b="1"/>
             <a:t>After Apprenticeship</a:t>
           </a:r>
-          <a:endParaRPr lang="en-US" dirty="0"/>
+          <a:endParaRPr lang="en-US"/>
         </a:p>
       </dgm:t>
     </dgm:pt>
@@ -6054,7 +6116,7 @@
         <a:lstStyle/>
         <a:p>
           <a:r>
-            <a:rPr lang="en-US" i="1" dirty="0"/>
+            <a:rPr lang="en-US" i="1"/>
             <a:t>Courses and Certifications</a:t>
           </a:r>
         </a:p>
@@ -6090,25 +6152,25 @@
         <a:lstStyle/>
         <a:p>
           <a:r>
-            <a:rPr lang="en-US" b="0" i="1" baseline="0" dirty="0"/>
+            <a:rPr lang="en-US" b="0" i="1" baseline="0"/>
             <a:t>Data Engineering processes (ETL Processes, </a:t>
           </a:r>
           <a:r>
-            <a:rPr lang="en-US" i="1" dirty="0"/>
+            <a:rPr lang="en-US" i="1"/>
             <a:t>Data Analysis &amp; Visualization</a:t>
           </a:r>
           <a:r>
-            <a:rPr lang="en-US" b="0" i="1" baseline="0" dirty="0"/>
+            <a:rPr lang="en-US" b="0" i="1" baseline="0"/>
             <a:t>)</a:t>
           </a:r>
           <a:br>
-            <a:rPr lang="en-US" b="0" i="0" baseline="0" dirty="0"/>
+            <a:rPr lang="en-US" b="0" i="0" baseline="0"/>
           </a:br>
           <a:r>
-            <a:rPr lang="en-US" b="0" i="0" baseline="0" dirty="0"/>
+            <a:rPr lang="en-US" b="0" i="0" baseline="0"/>
             <a:t>	</a:t>
           </a:r>
-          <a:endParaRPr lang="en-US" dirty="0"/>
+          <a:endParaRPr lang="en-US"/>
         </a:p>
       </dgm:t>
     </dgm:pt>
@@ -6142,7 +6204,7 @@
         <a:lstStyle/>
         <a:p>
           <a:r>
-            <a:rPr lang="en-US" i="1" dirty="0"/>
+            <a:rPr lang="en-US" i="1"/>
             <a:t>Database Management, Data Security &amp; Governance</a:t>
           </a:r>
         </a:p>
@@ -6177,7 +6239,7 @@
         <a:bodyPr/>
         <a:lstStyle/>
         <a:p>
-          <a:endParaRPr lang="en-US" dirty="0"/>
+          <a:endParaRPr lang="en-US"/>
         </a:p>
       </dgm:t>
     </dgm:pt>
@@ -6210,7 +6272,7 @@
         <a:bodyPr/>
         <a:lstStyle/>
         <a:p>
-          <a:endParaRPr lang="en-US" dirty="0"/>
+          <a:endParaRPr lang="en-US"/>
         </a:p>
       </dgm:t>
     </dgm:pt>
@@ -6243,7 +6305,7 @@
         <a:bodyPr/>
         <a:lstStyle/>
         <a:p>
-          <a:endParaRPr lang="en-US" i="1" dirty="0"/>
+          <a:endParaRPr lang="en-US" i="1"/>
         </a:p>
       </dgm:t>
     </dgm:pt>
@@ -6277,7 +6339,7 @@
         <a:lstStyle/>
         <a:p>
           <a:r>
-            <a:rPr lang="en-US" i="1" dirty="0"/>
+            <a:rPr lang="en-US" i="1"/>
             <a:t>Developing skillsets related to Data Engineering (Database Management, Data Processing)</a:t>
           </a:r>
         </a:p>
@@ -6313,11 +6375,11 @@
         <a:lstStyle/>
         <a:p>
           <a:r>
-            <a:rPr lang="en-US" i="1" dirty="0"/>
+            <a:rPr lang="en-US" i="1"/>
             <a:t>Specialization in </a:t>
           </a:r>
           <a:r>
-            <a:rPr lang="en-US" i="1" u="none" dirty="0"/>
+            <a:rPr lang="en-US" i="1" u="none"/>
             <a:t>Data Structures and Algorithms</a:t>
           </a:r>
         </a:p>
@@ -6353,10 +6415,10 @@
         <a:lstStyle/>
         <a:p>
           <a:r>
-            <a:rPr lang="en-US" b="0" i="1" baseline="0" dirty="0"/>
+            <a:rPr lang="en-US" b="0" i="1" baseline="0"/>
             <a:t>Agile Methodology</a:t>
           </a:r>
-          <a:endParaRPr lang="en-US" dirty="0"/>
+          <a:endParaRPr lang="en-US"/>
         </a:p>
       </dgm:t>
     </dgm:pt>
@@ -6519,18 +6581,18 @@
             </a:lnSpc>
           </a:pPr>
           <a:r>
-            <a:rPr lang="en-US" sz="2800" b="1" dirty="0"/>
+            <a:rPr lang="en-US" sz="2800" b="1"/>
             <a:t>ETL </a:t>
           </a:r>
           <a:r>
-            <a:rPr lang="en-US" sz="2800" b="1" dirty="0">
+            <a:rPr lang="en-US" sz="2800" b="1">
               <a:solidFill>
                 <a:schemeClr val="tx1"/>
               </a:solidFill>
             </a:rPr>
             <a:t>Pipeline</a:t>
           </a:r>
-          <a:endParaRPr lang="en-US" sz="2800" dirty="0">
+          <a:endParaRPr lang="en-US" sz="2800">
             <a:solidFill>
               <a:schemeClr val="tx1"/>
             </a:solidFill>
@@ -6661,10 +6723,10 @@
             </a:lnSpc>
           </a:pPr>
           <a:r>
-            <a:rPr lang="en-US" sz="2800" b="1" dirty="0"/>
+            <a:rPr lang="en-US" sz="2800" b="1"/>
             <a:t>Command Line Interface</a:t>
           </a:r>
-          <a:endParaRPr lang="en-US" sz="2800" dirty="0"/>
+          <a:endParaRPr lang="en-US" sz="2800"/>
         </a:p>
       </dgm:t>
     </dgm:pt>
@@ -6786,10 +6848,10 @@
             </a:lnSpc>
           </a:pPr>
           <a:r>
-            <a:rPr lang="en-US" sz="2800" b="1" dirty="0"/>
+            <a:rPr lang="en-US" sz="2800" b="1"/>
             <a:t>Analysis &amp; Visualization</a:t>
           </a:r>
-          <a:endParaRPr lang="en-US" sz="2800" dirty="0"/>
+          <a:endParaRPr lang="en-US" sz="2800"/>
         </a:p>
       </dgm:t>
     </dgm:pt>
@@ -6911,7 +6973,7 @@
         <a:lstStyle/>
         <a:p>
           <a:r>
-            <a:rPr lang="en-US" b="1" dirty="0"/>
+            <a:rPr lang="en-US" b="1"/>
             <a:t>1. Data Migration Setup</a:t>
           </a:r>
         </a:p>
@@ -6947,7 +7009,7 @@
         <a:lstStyle/>
         <a:p>
           <a:r>
-            <a:rPr lang="en-US" b="1" dirty="0"/>
+            <a:rPr lang="en-US" b="1"/>
             <a:t>2. Data Client</a:t>
           </a:r>
         </a:p>
@@ -6983,7 +7045,7 @@
         <a:lstStyle/>
         <a:p>
           <a:r>
-            <a:rPr lang="en-US" b="1" dirty="0"/>
+            <a:rPr lang="en-US" b="1"/>
             <a:t>3. Command Line Interface</a:t>
           </a:r>
         </a:p>
@@ -7019,7 +7081,7 @@
         <a:lstStyle/>
         <a:p>
           <a:r>
-            <a:rPr lang="en-US" b="1" dirty="0"/>
+            <a:rPr lang="en-US" b="1"/>
             <a:t>4. Application</a:t>
           </a:r>
         </a:p>
@@ -7365,14 +7427,14 @@
             <a:buNone/>
           </a:pPr>
           <a:r>
-            <a:rPr lang="en-US" sz="1500" b="1" i="0" kern="1200" baseline="0" dirty="0">
+            <a:rPr lang="en-US" sz="1500" b="1" i="0" kern="1200" baseline="0">
               <a:solidFill>
                 <a:srgbClr val="FFFFFF"/>
               </a:solidFill>
             </a:rPr>
             <a:t>Before Apprenticeship</a:t>
           </a:r>
-          <a:endParaRPr lang="en-US" sz="1500" kern="1200" dirty="0">
+          <a:endParaRPr lang="en-US" sz="1500" kern="1200">
             <a:solidFill>
               <a:srgbClr val="FFFFFF"/>
             </a:solidFill>
@@ -7433,7 +7495,7 @@
             </a:spcAft>
             <a:buChar char="•"/>
           </a:pPr>
-          <a:endParaRPr lang="en-US" sz="1200" kern="1200" dirty="0"/>
+          <a:endParaRPr lang="en-US" sz="1200" kern="1200"/>
         </a:p>
         <a:p>
           <a:pPr marL="114300" lvl="1" indent="-114300" algn="l" defTabSz="533400">
@@ -7449,10 +7511,10 @@
             <a:buChar char="•"/>
           </a:pPr>
           <a:r>
-            <a:rPr lang="en-US" sz="1200" i="1" kern="1200" dirty="0"/>
+            <a:rPr lang="en-US" sz="1200" i="1" kern="1200"/>
             <a:t>Software Engineering (JavaScript, HTML, CSS, Java, Python)</a:t>
           </a:r>
-          <a:endParaRPr lang="en-US" sz="1200" kern="1200" dirty="0"/>
+          <a:endParaRPr lang="en-US" sz="1200" kern="1200"/>
         </a:p>
         <a:p>
           <a:pPr marL="114300" lvl="1" indent="-114300" algn="l" defTabSz="533400">
@@ -7468,7 +7530,7 @@
             <a:buChar char="•"/>
           </a:pPr>
           <a:r>
-            <a:rPr lang="en-US" sz="1200" i="1" kern="1200" dirty="0"/>
+            <a:rPr lang="en-US" sz="1200" i="1" kern="1200"/>
             <a:t>Object-Oriented Programming, Dynamic Programming</a:t>
           </a:r>
         </a:p>
@@ -7486,11 +7548,11 @@
             <a:buChar char="•"/>
           </a:pPr>
           <a:r>
-            <a:rPr lang="en-US" sz="1200" i="1" kern="1200" dirty="0"/>
+            <a:rPr lang="en-US" sz="1200" i="1" kern="1200"/>
             <a:t>Specialization in </a:t>
           </a:r>
           <a:r>
-            <a:rPr lang="en-US" sz="1200" i="1" u="none" kern="1200" dirty="0"/>
+            <a:rPr lang="en-US" sz="1200" i="1" u="none" kern="1200"/>
             <a:t>Data Structures and Algorithms</a:t>
           </a:r>
         </a:p>
@@ -7507,7 +7569,7 @@
             </a:spcAft>
             <a:buChar char="•"/>
           </a:pPr>
-          <a:endParaRPr lang="en-US" sz="1200" kern="1200" dirty="0"/>
+          <a:endParaRPr lang="en-US" sz="1200" kern="1200"/>
         </a:p>
       </dsp:txBody>
       <dsp:txXfrm>
@@ -7583,10 +7645,10 @@
             <a:buNone/>
           </a:pPr>
           <a:r>
-            <a:rPr lang="en-US" sz="1500" b="1" kern="1200" dirty="0"/>
+            <a:rPr lang="en-US" sz="1500" b="1" kern="1200"/>
             <a:t>During Apprenticeship</a:t>
           </a:r>
-          <a:endParaRPr lang="en-US" sz="1500" kern="1200" dirty="0"/>
+          <a:endParaRPr lang="en-US" sz="1500" kern="1200"/>
         </a:p>
       </dsp:txBody>
       <dsp:txXfrm>
@@ -7643,7 +7705,7 @@
             </a:spcAft>
             <a:buChar char="•"/>
           </a:pPr>
-          <a:endParaRPr lang="en-US" sz="1200" kern="1200" dirty="0"/>
+          <a:endParaRPr lang="en-US" sz="1200" kern="1200"/>
         </a:p>
         <a:p>
           <a:pPr marL="114300" lvl="1" indent="-114300" algn="l" defTabSz="533400">
@@ -7659,7 +7721,7 @@
             <a:buChar char="•"/>
           </a:pPr>
           <a:r>
-            <a:rPr lang="en-US" sz="1200" i="1" kern="1200" dirty="0"/>
+            <a:rPr lang="en-US" sz="1200" i="1" kern="1200"/>
             <a:t>Database Management, Data Security &amp; Governance</a:t>
           </a:r>
         </a:p>
@@ -7677,10 +7739,10 @@
             <a:buChar char="•"/>
           </a:pPr>
           <a:r>
-            <a:rPr lang="en-US" sz="1200" b="0" i="1" kern="1200" baseline="0" dirty="0"/>
+            <a:rPr lang="en-US" sz="1200" b="0" i="1" kern="1200" baseline="0"/>
             <a:t>Agile Methodology</a:t>
           </a:r>
-          <a:endParaRPr lang="en-US" sz="1200" kern="1200" dirty="0"/>
+          <a:endParaRPr lang="en-US" sz="1200" kern="1200"/>
         </a:p>
         <a:p>
           <a:pPr marL="114300" lvl="1" indent="-114300" algn="l" defTabSz="533400">
@@ -7696,25 +7758,25 @@
             <a:buChar char="•"/>
           </a:pPr>
           <a:r>
-            <a:rPr lang="en-US" sz="1200" b="0" i="1" kern="1200" baseline="0" dirty="0"/>
+            <a:rPr lang="en-US" sz="1200" b="0" i="1" kern="1200" baseline="0"/>
             <a:t>Data Engineering processes (ETL Processes, </a:t>
           </a:r>
           <a:r>
-            <a:rPr lang="en-US" sz="1200" i="1" kern="1200" dirty="0"/>
+            <a:rPr lang="en-US" sz="1200" i="1" kern="1200"/>
             <a:t>Data Analysis &amp; Visualization</a:t>
           </a:r>
           <a:r>
-            <a:rPr lang="en-US" sz="1200" b="0" i="1" kern="1200" baseline="0" dirty="0"/>
+            <a:rPr lang="en-US" sz="1200" b="0" i="1" kern="1200" baseline="0"/>
             <a:t>)</a:t>
           </a:r>
           <a:br>
-            <a:rPr lang="en-US" sz="1200" b="0" i="0" kern="1200" baseline="0" dirty="0"/>
+            <a:rPr lang="en-US" sz="1200" b="0" i="0" kern="1200" baseline="0"/>
           </a:br>
           <a:r>
-            <a:rPr lang="en-US" sz="1200" b="0" i="0" kern="1200" baseline="0" dirty="0"/>
+            <a:rPr lang="en-US" sz="1200" b="0" i="0" kern="1200" baseline="0"/>
             <a:t>	</a:t>
           </a:r>
-          <a:endParaRPr lang="en-US" sz="1200" kern="1200" dirty="0"/>
+          <a:endParaRPr lang="en-US" sz="1200" kern="1200"/>
         </a:p>
       </dsp:txBody>
       <dsp:txXfrm>
@@ -7790,10 +7852,10 @@
             <a:buNone/>
           </a:pPr>
           <a:r>
-            <a:rPr lang="en-US" sz="1500" b="1" kern="1200" dirty="0"/>
+            <a:rPr lang="en-US" sz="1500" b="1" kern="1200"/>
             <a:t>After Apprenticeship</a:t>
           </a:r>
-          <a:endParaRPr lang="en-US" sz="1500" kern="1200" dirty="0"/>
+          <a:endParaRPr lang="en-US" sz="1500" kern="1200"/>
         </a:p>
       </dsp:txBody>
       <dsp:txXfrm>
@@ -7850,7 +7912,7 @@
             </a:spcAft>
             <a:buChar char="•"/>
           </a:pPr>
-          <a:endParaRPr lang="en-US" sz="1200" i="1" kern="1200" dirty="0"/>
+          <a:endParaRPr lang="en-US" sz="1200" i="1" kern="1200"/>
         </a:p>
         <a:p>
           <a:pPr marL="114300" lvl="1" indent="-114300" algn="l" defTabSz="533400">
@@ -7866,7 +7928,7 @@
             <a:buChar char="•"/>
           </a:pPr>
           <a:r>
-            <a:rPr lang="en-US" sz="1200" i="1" kern="1200" dirty="0"/>
+            <a:rPr lang="en-US" sz="1200" i="1" kern="1200"/>
             <a:t>Courses and Certifications</a:t>
           </a:r>
         </a:p>
@@ -7884,7 +7946,7 @@
             <a:buChar char="•"/>
           </a:pPr>
           <a:r>
-            <a:rPr lang="en-US" sz="1200" i="1" kern="1200" dirty="0"/>
+            <a:rPr lang="en-US" sz="1200" i="1" kern="1200"/>
             <a:t>Developing skillsets related to Data Engineering (Database Management, Data Processing)</a:t>
           </a:r>
         </a:p>
@@ -8045,18 +8107,18 @@
             <a:buNone/>
           </a:pPr>
           <a:r>
-            <a:rPr lang="en-US" sz="2800" b="1" kern="1200" dirty="0"/>
+            <a:rPr lang="en-US" sz="2800" b="1" kern="1200"/>
             <a:t>ETL </a:t>
           </a:r>
           <a:r>
-            <a:rPr lang="en-US" sz="2800" b="1" kern="1200" dirty="0">
+            <a:rPr lang="en-US" sz="2800" b="1" kern="1200">
               <a:solidFill>
                 <a:schemeClr val="tx1"/>
               </a:solidFill>
             </a:rPr>
             <a:t>Pipeline</a:t>
           </a:r>
-          <a:endParaRPr lang="en-US" sz="2800" kern="1200" dirty="0">
+          <a:endParaRPr lang="en-US" sz="2800" kern="1200">
             <a:solidFill>
               <a:schemeClr val="tx1"/>
             </a:solidFill>
@@ -8214,10 +8276,10 @@
             <a:buNone/>
           </a:pPr>
           <a:r>
-            <a:rPr lang="en-US" sz="2800" b="1" kern="1200" dirty="0"/>
+            <a:rPr lang="en-US" sz="2800" b="1" kern="1200"/>
             <a:t>Command Line Interface</a:t>
           </a:r>
-          <a:endParaRPr lang="en-US" sz="2800" kern="1200" dirty="0"/>
+          <a:endParaRPr lang="en-US" sz="2800" kern="1200"/>
         </a:p>
       </dsp:txBody>
       <dsp:txXfrm>
@@ -8376,10 +8438,10 @@
             <a:buNone/>
           </a:pPr>
           <a:r>
-            <a:rPr lang="en-US" sz="2800" b="1" kern="1200" dirty="0"/>
+            <a:rPr lang="en-US" sz="2800" b="1" kern="1200"/>
             <a:t>Analysis &amp; Visualization</a:t>
           </a:r>
-          <a:endParaRPr lang="en-US" sz="2800" kern="1200" dirty="0"/>
+          <a:endParaRPr lang="en-US" sz="2800" kern="1200"/>
         </a:p>
       </dsp:txBody>
       <dsp:txXfrm>
@@ -8499,7 +8561,7 @@
             <a:buNone/>
           </a:pPr>
           <a:r>
-            <a:rPr lang="en-US" sz="2300" b="1" kern="1200" dirty="0"/>
+            <a:rPr lang="en-US" sz="2300" b="1" kern="1200"/>
             <a:t>1. Data Migration Setup</a:t>
           </a:r>
         </a:p>
@@ -8609,7 +8671,7 @@
             <a:buNone/>
           </a:pPr>
           <a:r>
-            <a:rPr lang="en-US" sz="2300" b="1" kern="1200" dirty="0"/>
+            <a:rPr lang="en-US" sz="2300" b="1" kern="1200"/>
             <a:t>2. Data Client</a:t>
           </a:r>
         </a:p>
@@ -8719,7 +8781,7 @@
             <a:buNone/>
           </a:pPr>
           <a:r>
-            <a:rPr lang="en-US" sz="2200" b="1" kern="1200" dirty="0"/>
+            <a:rPr lang="en-US" sz="2200" b="1" kern="1200"/>
             <a:t>3. Command Line Interface</a:t>
           </a:r>
         </a:p>
@@ -8829,7 +8891,7 @@
             <a:buNone/>
           </a:pPr>
           <a:r>
-            <a:rPr lang="en-US" sz="2200" b="1" kern="1200" dirty="0"/>
+            <a:rPr lang="en-US" sz="2200" b="1" kern="1200"/>
             <a:t>4. Application</a:t>
           </a:r>
         </a:p>
@@ -15646,7 +15708,7 @@
           <a:lstStyle/>
           <a:p>
             <a:r>
-              <a:rPr lang="en-US" dirty="0"/>
+              <a:rPr lang="en-US"/>
               <a:t>Checklist:</a:t>
             </a:r>
           </a:p>
@@ -15656,10 +15718,10 @@
               <a:buChar char="-"/>
             </a:pPr>
             <a:r>
-              <a:rPr lang="en-US" dirty="0" err="1"/>
+              <a:rPr lang="en-US" err="1"/>
               <a:t>Waterbottle</a:t>
             </a:r>
-            <a:endParaRPr lang="en-US" dirty="0"/>
+            <a:endParaRPr lang="en-US"/>
           </a:p>
           <a:p>
             <a:pPr marL="171450" indent="-171450">
@@ -15667,7 +15729,7 @@
               <a:buChar char="-"/>
             </a:pPr>
             <a:r>
-              <a:rPr lang="en-US" dirty="0"/>
+              <a:rPr lang="en-US"/>
               <a:t>Start Application</a:t>
             </a:r>
           </a:p>
@@ -15677,15 +15739,15 @@
               <a:buChar char="-"/>
             </a:pPr>
             <a:r>
-              <a:rPr lang="en-US" dirty="0"/>
+              <a:rPr lang="en-US"/>
               <a:t>Drag </a:t>
             </a:r>
             <a:r>
-              <a:rPr lang="en-US" dirty="0" err="1"/>
+              <a:rPr lang="en-US" err="1"/>
               <a:t>VSCode</a:t>
             </a:r>
             <a:r>
-              <a:rPr lang="en-US" dirty="0"/>
+              <a:rPr lang="en-US"/>
               <a:t> to big screen</a:t>
             </a:r>
           </a:p>
@@ -15695,31 +15757,31 @@
               <a:buChar char="-"/>
             </a:pPr>
             <a:r>
-              <a:rPr lang="en-US" dirty="0"/>
+              <a:rPr lang="en-US"/>
               <a:t>Start timer</a:t>
             </a:r>
           </a:p>
           <a:p>
-            <a:endParaRPr lang="en-US" dirty="0"/>
+            <a:endParaRPr lang="en-US"/>
           </a:p>
           <a:p>
             <a:r>
-              <a:rPr lang="en-US" dirty="0"/>
+              <a:rPr lang="en-US"/>
               <a:t>Name</a:t>
             </a:r>
           </a:p>
           <a:p>
             <a:r>
-              <a:rPr lang="en-US" dirty="0"/>
+              <a:rPr lang="en-US"/>
               <a:t>ETL Process Manager for a Financial Client</a:t>
             </a:r>
           </a:p>
           <a:p>
-            <a:endParaRPr lang="en-US" dirty="0"/>
+            <a:endParaRPr lang="en-US"/>
           </a:p>
           <a:p>
             <a:r>
-              <a:rPr lang="en-US" dirty="0"/>
+              <a:rPr lang="en-US"/>
               <a:t>Background</a:t>
             </a:r>
           </a:p>
@@ -15824,39 +15886,45 @@
           <a:lstStyle/>
           <a:p>
             <a:r>
-              <a:rPr lang="en-US" dirty="0"/>
+              <a:rPr lang="en-US"/>
+              <a:t>7:00</a:t>
+            </a:r>
+          </a:p>
+          <a:p>
+            <a:r>
+              <a:rPr lang="en-US"/>
               <a:t>Utility – Component interaction</a:t>
             </a:r>
           </a:p>
           <a:p>
-            <a:endParaRPr lang="en-US" dirty="0"/>
+            <a:endParaRPr lang="en-US"/>
           </a:p>
           <a:p>
             <a:r>
-              <a:rPr lang="en-US" dirty="0"/>
+              <a:rPr lang="en-US"/>
               <a:t>Database connection (error handling)</a:t>
             </a:r>
           </a:p>
           <a:p>
             <a:r>
-              <a:rPr lang="en-US" dirty="0"/>
+              <a:rPr lang="en-US"/>
               <a:t>Data Client uses </a:t>
             </a:r>
             <a:r>
-              <a:rPr lang="en-US" dirty="0" err="1"/>
+              <a:rPr lang="en-US" err="1"/>
               <a:t>sql</a:t>
             </a:r>
             <a:r>
-              <a:rPr lang="en-US" dirty="0"/>
+              <a:rPr lang="en-US"/>
               <a:t> for pipeline</a:t>
             </a:r>
           </a:p>
           <a:p>
-            <a:endParaRPr lang="en-US" dirty="0"/>
+            <a:endParaRPr lang="en-US"/>
           </a:p>
           <a:p>
             <a:r>
-              <a:rPr lang="en-US" dirty="0"/>
+              <a:rPr lang="en-US"/>
               <a:t>Data is moved, how to access it</a:t>
             </a:r>
           </a:p>
@@ -15967,22 +16035,28 @@
           <a:lstStyle/>
           <a:p>
             <a:r>
-              <a:rPr lang="en-US" dirty="0"/>
+              <a:rPr lang="en-US"/>
+              <a:t>8:00</a:t>
+            </a:r>
+          </a:p>
+          <a:p>
+            <a:r>
+              <a:rPr lang="en-US"/>
               <a:t>Build a CLI (menu), not without menu components</a:t>
             </a:r>
           </a:p>
           <a:p>
             <a:r>
-              <a:rPr lang="en-US" dirty="0"/>
+              <a:rPr lang="en-US"/>
               <a:t>Use the menu components to make a menu</a:t>
             </a:r>
           </a:p>
           <a:p>
-            <a:endParaRPr lang="en-US" dirty="0"/>
+            <a:endParaRPr lang="en-US"/>
           </a:p>
           <a:p>
             <a:r>
-              <a:rPr lang="en-US" dirty="0"/>
+              <a:rPr lang="en-US"/>
               <a:t>All components made, how to manage workflow</a:t>
             </a:r>
           </a:p>
@@ -16075,36 +16149,38 @@
           <a:lstStyle/>
           <a:p>
             <a:r>
-              <a:rPr lang="en-US" dirty="0"/>
+              <a:rPr lang="en-US"/>
+              <a:t>9:00</a:t>
+            </a:r>
+          </a:p>
+          <a:p>
+            <a:r>
+              <a:rPr lang="en-US"/>
               <a:t>Modularity = Brief Application</a:t>
             </a:r>
           </a:p>
           <a:p>
             <a:r>
-              <a:rPr lang="en-US" dirty="0"/>
+              <a:rPr lang="en-US"/>
               <a:t>Application Workflow (In Order)</a:t>
             </a:r>
           </a:p>
           <a:p>
-            <a:endParaRPr lang="en-US" dirty="0"/>
-          </a:p>
-          <a:p>
-            <a:r>
-              <a:rPr lang="en-US" dirty="0"/>
-              <a:t>Application, show functionality</a:t>
-            </a:r>
-          </a:p>
-          <a:p>
-            <a:endParaRPr lang="en-US" dirty="0"/>
+            <a:endParaRPr lang="en-US"/>
           </a:p>
           <a:p>
             <a:r>
               <a:rPr lang="en-US"/>
-              <a:t>Lead How </a:t>
+              <a:t>DEMO, show functionality</a:t>
             </a:r>
+          </a:p>
+          <a:p>
+            <a:endParaRPr lang="en-US"/>
+          </a:p>
+          <a:p>
             <a:r>
-              <a:rPr lang="en-US" dirty="0"/>
-              <a:t>was this organized</a:t>
+              <a:rPr lang="en-US"/>
+              <a:t>Lead How was this organized</a:t>
             </a:r>
           </a:p>
         </p:txBody>
@@ -16190,7 +16266,22 @@
           <a:lstStyle/>
           <a:p>
             <a:r>
-              <a:rPr lang="en-US" dirty="0"/>
+              <a:rPr lang="en-US"/>
+              <a:t>10:00</a:t>
+            </a:r>
+          </a:p>
+          <a:p>
+            <a:r>
+              <a:rPr lang="en-US"/>
+              <a:t>Showed functionality, how did I organize it</a:t>
+            </a:r>
+          </a:p>
+          <a:p>
+            <a:endParaRPr lang="en-US"/>
+          </a:p>
+          <a:p>
+            <a:r>
+              <a:rPr lang="en-US"/>
               <a:t>Very brief</a:t>
             </a:r>
           </a:p>
@@ -16213,16 +16304,16 @@
               <a:defRPr/>
             </a:pPr>
             <a:r>
-              <a:rPr lang="en-US" dirty="0"/>
+              <a:rPr lang="en-US"/>
               <a:t>Save time for conclusion and Q&amp;A</a:t>
             </a:r>
           </a:p>
           <a:p>
-            <a:endParaRPr lang="en-US" dirty="0"/>
+            <a:endParaRPr lang="en-US"/>
           </a:p>
           <a:p>
             <a:r>
-              <a:rPr lang="en-US" dirty="0"/>
+              <a:rPr lang="en-US"/>
               <a:t>First two problems solved, lastly visualization</a:t>
             </a:r>
           </a:p>
@@ -16309,29 +16400,29 @@
           <a:lstStyle/>
           <a:p>
             <a:r>
-              <a:rPr lang="en-US" dirty="0"/>
+              <a:rPr lang="en-US"/>
               <a:t>Salesman: “Increase advertisement for education around august”</a:t>
             </a:r>
             <a:br>
-              <a:rPr lang="en-US" dirty="0"/>
+              <a:rPr lang="en-US"/>
             </a:br>
             <a:r>
-              <a:rPr lang="en-US" dirty="0"/>
+              <a:rPr lang="en-US"/>
               <a:t>Brief, save time for Q&amp;A</a:t>
             </a:r>
           </a:p>
           <a:p>
             <a:br>
-              <a:rPr lang="en-US" dirty="0"/>
+              <a:rPr lang="en-US"/>
             </a:br>
             <a:r>
-              <a:rPr lang="en-US" dirty="0"/>
+              <a:rPr lang="en-US"/>
               <a:t>Tableau Public Viz Link:</a:t>
             </a:r>
           </a:p>
           <a:p>
             <a:r>
-              <a:rPr lang="en-US" dirty="0"/>
+              <a:rPr lang="en-US"/>
               <a:t>https://public.tableau.com/views/CustomerDataDashboard_17484417707510/CustomerDataDashboard?:language=en-US&amp;:sid=&amp;:redirect=auth&amp;:display_count=n&amp;:origin=viz_share_link</a:t>
             </a:r>
           </a:p>
@@ -16436,47 +16527,47 @@
           <a:lstStyle/>
           <a:p>
             <a:r>
-              <a:rPr lang="en-US" dirty="0"/>
+              <a:rPr lang="en-US"/>
               <a:t>Tell them what you told them</a:t>
             </a:r>
           </a:p>
           <a:p>
-            <a:endParaRPr lang="en-US" dirty="0"/>
+            <a:endParaRPr lang="en-US"/>
           </a:p>
           <a:p>
             <a:r>
-              <a:rPr lang="en-US" dirty="0"/>
+              <a:rPr lang="en-US"/>
               <a:t>Pipeline – Makes data clean non-local</a:t>
             </a:r>
           </a:p>
           <a:p>
             <a:r>
-              <a:rPr lang="en-US" dirty="0"/>
+              <a:rPr lang="en-US"/>
               <a:t>CLI – Makes data easily accessible</a:t>
             </a:r>
           </a:p>
           <a:p>
             <a:r>
-              <a:rPr lang="en-US" dirty="0"/>
+              <a:rPr lang="en-US"/>
               <a:t>Tableau – Enables story-telling and claims</a:t>
             </a:r>
           </a:p>
           <a:p>
-            <a:endParaRPr lang="en-US" dirty="0"/>
+            <a:endParaRPr lang="en-US"/>
           </a:p>
           <a:p>
             <a:r>
-              <a:rPr lang="en-US" dirty="0" err="1"/>
+              <a:rPr lang="en-US" err="1"/>
               <a:t>Github</a:t>
             </a:r>
             <a:r>
-              <a:rPr lang="en-US" dirty="0"/>
+              <a:rPr lang="en-US"/>
               <a:t> + LinkedIn</a:t>
             </a:r>
           </a:p>
           <a:p>
             <a:r>
-              <a:rPr lang="en-US" dirty="0"/>
+              <a:rPr lang="en-US"/>
               <a:t>Give time for Q&amp;A</a:t>
             </a:r>
           </a:p>
@@ -16569,47 +16660,53 @@
           <a:lstStyle/>
           <a:p>
             <a:r>
-              <a:rPr lang="en-US" dirty="0" err="1"/>
+              <a:rPr lang="en-US"/>
+              <a:t>2:00</a:t>
+            </a:r>
+          </a:p>
+          <a:p>
+            <a:r>
+              <a:rPr lang="en-US" err="1"/>
               <a:t>Vscode</a:t>
             </a:r>
             <a:r>
-              <a:rPr lang="en-US" dirty="0"/>
+              <a:rPr lang="en-US"/>
               <a:t> should be on the main screen</a:t>
             </a:r>
           </a:p>
           <a:p>
-            <a:endParaRPr lang="en-US" dirty="0"/>
+            <a:endParaRPr lang="en-US"/>
           </a:p>
           <a:p>
             <a:r>
-              <a:rPr lang="en-US" dirty="0"/>
+              <a:rPr lang="en-US"/>
               <a:t>Role, Company</a:t>
             </a:r>
           </a:p>
           <a:p>
             <a:r>
-              <a:rPr lang="en-US" dirty="0"/>
+              <a:rPr lang="en-US"/>
               <a:t>Background (childhood, Software Engineer, DSA)</a:t>
             </a:r>
           </a:p>
           <a:p>
             <a:r>
-              <a:rPr lang="en-US" dirty="0"/>
+              <a:rPr lang="en-US"/>
               <a:t>Current (Learning)</a:t>
             </a:r>
           </a:p>
           <a:p>
             <a:r>
-              <a:rPr lang="en-US" dirty="0"/>
+              <a:rPr lang="en-US"/>
               <a:t>Future (Courses, Certifications, Learning as much as I can)</a:t>
             </a:r>
           </a:p>
           <a:p>
-            <a:endParaRPr lang="en-US" dirty="0"/>
+            <a:endParaRPr lang="en-US"/>
           </a:p>
           <a:p>
             <a:r>
-              <a:rPr lang="en-US" dirty="0"/>
+              <a:rPr lang="en-US"/>
               <a:t>Problem</a:t>
             </a:r>
           </a:p>
@@ -16696,43 +16793,43 @@
           <a:lstStyle/>
           <a:p>
             <a:r>
-              <a:rPr lang="en-US" dirty="0"/>
+              <a:rPr lang="en-US"/>
               <a:t>Control your speech tempo and affliction</a:t>
             </a:r>
           </a:p>
           <a:p>
-            <a:endParaRPr lang="en-US" dirty="0"/>
+            <a:endParaRPr lang="en-US"/>
           </a:p>
           <a:p>
             <a:r>
-              <a:rPr lang="en-US" dirty="0"/>
+              <a:rPr lang="en-US"/>
               <a:t>A FINANCIAL SERVICES CLIENT</a:t>
             </a:r>
           </a:p>
           <a:p>
             <a:r>
-              <a:rPr lang="en-US" dirty="0"/>
+              <a:rPr lang="en-US"/>
               <a:t>Client Need</a:t>
             </a:r>
           </a:p>
           <a:p>
             <a:r>
-              <a:rPr lang="en-US" dirty="0"/>
+              <a:rPr lang="en-US"/>
               <a:t>Problems</a:t>
             </a:r>
           </a:p>
           <a:p>
             <a:r>
-              <a:rPr lang="en-US" dirty="0"/>
+              <a:rPr lang="en-US"/>
               <a:t>Non-visual (Need to support a claim)</a:t>
             </a:r>
           </a:p>
           <a:p>
-            <a:endParaRPr lang="en-US" dirty="0"/>
+            <a:endParaRPr lang="en-US"/>
           </a:p>
           <a:p>
             <a:r>
-              <a:rPr lang="en-US" dirty="0"/>
+              <a:rPr lang="en-US"/>
               <a:t>Lead into project overview</a:t>
             </a:r>
           </a:p>
@@ -16819,46 +16916,43 @@
           <a:lstStyle/>
           <a:p>
             <a:r>
-              <a:rPr lang="en-US" dirty="0"/>
+              <a:rPr lang="en-US"/>
               <a:t>3:00</a:t>
             </a:r>
           </a:p>
           <a:p>
-            <a:endParaRPr lang="en-US" dirty="0"/>
-          </a:p>
-          <a:p>
             <a:r>
-              <a:rPr lang="en-US" dirty="0"/>
+              <a:rPr lang="en-US"/>
               <a:t>Lead from the problems being solved</a:t>
             </a:r>
           </a:p>
           <a:p>
-            <a:endParaRPr lang="en-US" dirty="0"/>
+            <a:endParaRPr lang="en-US"/>
           </a:p>
           <a:p>
             <a:r>
-              <a:rPr lang="en-US" dirty="0"/>
+              <a:rPr lang="en-US"/>
               <a:t>Tell them what you’re going to tell them</a:t>
             </a:r>
           </a:p>
           <a:p>
             <a:r>
-              <a:rPr lang="en-US" dirty="0"/>
+              <a:rPr lang="en-US"/>
               <a:t>Problem – Solution</a:t>
             </a:r>
           </a:p>
           <a:p>
             <a:r>
-              <a:rPr lang="en-US" dirty="0"/>
+              <a:rPr lang="en-US"/>
               <a:t>Brief Explanation of Components</a:t>
             </a:r>
           </a:p>
           <a:p>
-            <a:endParaRPr lang="en-US" dirty="0"/>
+            <a:endParaRPr lang="en-US"/>
           </a:p>
           <a:p>
             <a:r>
-              <a:rPr lang="en-US" dirty="0"/>
+              <a:rPr lang="en-US"/>
               <a:t>Tools being used</a:t>
             </a:r>
           </a:p>
@@ -16945,43 +17039,49 @@
           <a:lstStyle/>
           <a:p>
             <a:r>
-              <a:rPr lang="en-US" dirty="0"/>
+              <a:rPr lang="en-US"/>
+              <a:t>4:00</a:t>
+            </a:r>
+          </a:p>
+          <a:p>
+            <a:r>
+              <a:rPr lang="en-US"/>
               <a:t>Very brief</a:t>
             </a:r>
           </a:p>
           <a:p>
-            <a:endParaRPr lang="en-US" dirty="0"/>
+            <a:endParaRPr lang="en-US"/>
           </a:p>
           <a:p>
             <a:r>
-              <a:rPr lang="en-US" dirty="0"/>
+              <a:rPr lang="en-US"/>
               <a:t>Store data</a:t>
             </a:r>
           </a:p>
           <a:p>
             <a:r>
-              <a:rPr lang="en-US" dirty="0"/>
+              <a:rPr lang="en-US"/>
               <a:t>Process Data</a:t>
             </a:r>
           </a:p>
           <a:p>
             <a:r>
-              <a:rPr lang="en-US" dirty="0"/>
+              <a:rPr lang="en-US"/>
               <a:t>Application (Management)</a:t>
             </a:r>
           </a:p>
           <a:p>
             <a:r>
-              <a:rPr lang="en-US" dirty="0"/>
+              <a:rPr lang="en-US"/>
               <a:t>Analysis &amp; Visualization</a:t>
             </a:r>
           </a:p>
           <a:p>
-            <a:endParaRPr lang="en-US" dirty="0"/>
+            <a:endParaRPr lang="en-US"/>
           </a:p>
           <a:p>
             <a:r>
-              <a:rPr lang="en-US" dirty="0"/>
+              <a:rPr lang="en-US"/>
               <a:t>How these tools interact (workflow)</a:t>
             </a:r>
           </a:p>
@@ -17068,25 +17168,25 @@
           <a:lstStyle/>
           <a:p>
             <a:r>
-              <a:rPr lang="en-US" dirty="0"/>
+              <a:rPr lang="en-US"/>
               <a:t>Data Client purpose (Modularity)</a:t>
             </a:r>
           </a:p>
           <a:p>
             <a:r>
-              <a:rPr lang="en-US" dirty="0"/>
+              <a:rPr lang="en-US"/>
               <a:t>- Cybersecurity &amp; Cloud</a:t>
             </a:r>
           </a:p>
           <a:p>
             <a:r>
-              <a:rPr lang="en-US" dirty="0"/>
+              <a:rPr lang="en-US"/>
               <a:t>ETL Pipeline</a:t>
             </a:r>
           </a:p>
           <a:p>
             <a:r>
-              <a:rPr lang="en-US" dirty="0"/>
+              <a:rPr lang="en-US"/>
               <a:t>Problem – Solution</a:t>
             </a:r>
           </a:p>
@@ -17173,13 +17273,13 @@
           <a:lstStyle/>
           <a:p>
             <a:r>
-              <a:rPr lang="en-US" dirty="0"/>
+              <a:rPr lang="en-US"/>
               <a:t>Python CLI</a:t>
             </a:r>
           </a:p>
           <a:p>
             <a:r>
-              <a:rPr lang="en-US" dirty="0"/>
+              <a:rPr lang="en-US"/>
               <a:t>CLI -&gt; Database through Data Client</a:t>
             </a:r>
           </a:p>
@@ -17202,7 +17302,7 @@
               <a:defRPr/>
             </a:pPr>
             <a:r>
-              <a:rPr lang="en-US" dirty="0"/>
+              <a:rPr lang="en-US"/>
               <a:t>Problem - Solution</a:t>
             </a:r>
           </a:p>
@@ -17289,40 +17389,46 @@
           <a:lstStyle/>
           <a:p>
             <a:r>
-              <a:rPr lang="en-US" dirty="0"/>
+              <a:rPr lang="en-US"/>
+              <a:t>5:00</a:t>
+            </a:r>
+          </a:p>
+          <a:p>
+            <a:r>
+              <a:rPr lang="en-US"/>
               <a:t>Showed the overview, now the steps to get there</a:t>
             </a:r>
           </a:p>
           <a:p>
             <a:r>
-              <a:rPr lang="en-US" dirty="0"/>
+              <a:rPr lang="en-US"/>
               <a:t>Quick and Brief</a:t>
             </a:r>
           </a:p>
           <a:p>
-            <a:endParaRPr lang="en-US" dirty="0"/>
+            <a:endParaRPr lang="en-US"/>
           </a:p>
           <a:p>
             <a:r>
-              <a:rPr lang="en-US" dirty="0"/>
+              <a:rPr lang="en-US"/>
               <a:t>Create Database</a:t>
             </a:r>
           </a:p>
           <a:p>
             <a:r>
-              <a:rPr lang="en-US" dirty="0"/>
+              <a:rPr lang="en-US"/>
               <a:t>Database Connection and Interaction</a:t>
             </a:r>
           </a:p>
           <a:p>
             <a:r>
-              <a:rPr lang="en-US" dirty="0"/>
+              <a:rPr lang="en-US"/>
               <a:t>User-friendly for non-technical</a:t>
             </a:r>
           </a:p>
           <a:p>
             <a:r>
-              <a:rPr lang="en-US" dirty="0"/>
+              <a:rPr lang="en-US"/>
               <a:t>Full Application workflow</a:t>
             </a:r>
           </a:p>
@@ -17427,37 +17533,43 @@
           <a:lstStyle/>
           <a:p>
             <a:r>
-              <a:rPr lang="en-US" dirty="0"/>
+              <a:rPr lang="en-US"/>
+              <a:t>6:00</a:t>
+            </a:r>
+          </a:p>
+          <a:p>
+            <a:r>
+              <a:rPr lang="en-US"/>
               <a:t>Tell them</a:t>
             </a:r>
           </a:p>
           <a:p>
             <a:r>
-              <a:rPr lang="en-US" dirty="0"/>
+              <a:rPr lang="en-US"/>
               <a:t>Control speech tempo and dynamics</a:t>
             </a:r>
           </a:p>
           <a:p>
-            <a:endParaRPr lang="en-US" dirty="0"/>
+            <a:endParaRPr lang="en-US"/>
           </a:p>
           <a:p>
             <a:r>
-              <a:rPr lang="en-US" dirty="0"/>
+              <a:rPr lang="en-US"/>
               <a:t>Raw Data</a:t>
             </a:r>
           </a:p>
           <a:p>
             <a:r>
-              <a:rPr lang="en-US" dirty="0"/>
+              <a:rPr lang="en-US"/>
               <a:t>Database – Sike, create the database</a:t>
             </a:r>
           </a:p>
           <a:p>
-            <a:endParaRPr lang="en-US" dirty="0"/>
+            <a:endParaRPr lang="en-US"/>
           </a:p>
           <a:p>
             <a:r>
-              <a:rPr lang="en-US" dirty="0"/>
+              <a:rPr lang="en-US"/>
               <a:t>How to get from point A to point B</a:t>
             </a:r>
           </a:p>
@@ -21253,7 +21365,7 @@
           <a:lstStyle/>
           <a:p>
             <a:pPr algn="ctr"/>
-            <a:endParaRPr lang="en-US" dirty="0"/>
+            <a:endParaRPr lang="en-US"/>
           </a:p>
         </p:txBody>
       </p:sp>
@@ -21287,7 +21399,7 @@
           <a:p>
             <a:pPr algn="l"/>
             <a:r>
-              <a:rPr lang="en-US" sz="4800" b="1" dirty="0">
+              <a:rPr lang="en-US" sz="4800" b="1">
                 <a:solidFill>
                   <a:srgbClr val="FFFFFF"/>
                 </a:solidFill>
@@ -21295,14 +21407,14 @@
               <a:t>ETL Process Manager</a:t>
             </a:r>
             <a:br>
-              <a:rPr lang="en-US" sz="4800" dirty="0">
+              <a:rPr lang="en-US" sz="4800">
                 <a:solidFill>
                   <a:srgbClr val="FFFFFF"/>
                 </a:solidFill>
               </a:rPr>
             </a:br>
             <a:r>
-              <a:rPr lang="en-US" sz="4800" dirty="0">
+              <a:rPr lang="en-US" sz="4800">
                 <a:solidFill>
                   <a:srgbClr val="FFFFFF"/>
                 </a:solidFill>
@@ -21418,7 +21530,7 @@
           <a:p>
             <a:pPr algn="l"/>
             <a:r>
-              <a:rPr lang="en-US" dirty="0">
+              <a:rPr lang="en-US">
                 <a:solidFill>
                   <a:srgbClr val="FFFFFF"/>
                 </a:solidFill>
@@ -21909,7 +22021,7 @@
           <a:lstStyle/>
           <a:p>
             <a:pPr algn="ctr"/>
-            <a:endParaRPr lang="en-US" dirty="0"/>
+            <a:endParaRPr lang="en-US"/>
           </a:p>
         </p:txBody>
       </p:sp>
@@ -21943,7 +22055,7 @@
           <a:p>
             <a:pPr algn="ctr"/>
             <a:r>
-              <a:rPr lang="en-US" sz="4400" b="1" dirty="0">
+              <a:rPr lang="en-US" sz="4400" b="1">
                 <a:solidFill>
                   <a:schemeClr val="bg1"/>
                 </a:solidFill>
@@ -22031,7 +22143,7 @@
           <a:p>
             <a:pPr algn="ctr"/>
             <a:r>
-              <a:rPr lang="en-US" dirty="0">
+              <a:rPr lang="en-US">
                 <a:effectLst>
                   <a:outerShdw blurRad="50800" dist="38100" dir="2700000" algn="tl" rotWithShape="0">
                     <a:prstClr val="black">
@@ -22044,7 +22156,7 @@
               <a:t>sql.py </a:t>
             </a:r>
             <a:r>
-              <a:rPr lang="en-US" b="1" dirty="0">
+              <a:rPr lang="en-US" b="1">
                 <a:effectLst>
                   <a:outerShdw blurRad="50800" dist="38100" dir="2700000" algn="tl" rotWithShape="0">
                     <a:prstClr val="black">
@@ -22141,7 +22253,7 @@
               <a:buChar char="-"/>
             </a:pPr>
             <a:r>
-              <a:rPr lang="en-US" dirty="0"/>
+              <a:rPr lang="en-US"/>
               <a:t>General-Purpose</a:t>
             </a:r>
           </a:p>
@@ -22151,7 +22263,7 @@
               <a:buChar char="-"/>
             </a:pPr>
             <a:r>
-              <a:rPr lang="en-US" dirty="0"/>
+              <a:rPr lang="en-US"/>
               <a:t>Database Interaction</a:t>
             </a:r>
           </a:p>
@@ -22161,7 +22273,7 @@
               <a:buChar char="-"/>
             </a:pPr>
             <a:r>
-              <a:rPr lang="en-US" dirty="0"/>
+              <a:rPr lang="en-US"/>
               <a:t>Error Handling</a:t>
             </a:r>
           </a:p>
@@ -22197,7 +22309,7 @@
           <a:p>
             <a:pPr algn="ctr"/>
             <a:r>
-              <a:rPr lang="en-US" dirty="0">
+              <a:rPr lang="en-US">
                 <a:effectLst>
                   <a:outerShdw blurRad="50800" dist="38100" dir="2700000" algn="tl" rotWithShape="0">
                     <a:prstClr val="black">
@@ -22210,7 +22322,7 @@
               <a:t>data_client.py </a:t>
             </a:r>
             <a:r>
-              <a:rPr lang="en-US" b="1" dirty="0">
+              <a:rPr lang="en-US" b="1">
                 <a:effectLst>
                   <a:outerShdw blurRad="50800" dist="38100" dir="2700000" algn="tl" rotWithShape="0">
                     <a:prstClr val="black">
@@ -22307,7 +22419,7 @@
               <a:buChar char="-"/>
             </a:pPr>
             <a:r>
-              <a:rPr lang="en-US" dirty="0"/>
+              <a:rPr lang="en-US"/>
               <a:t>Application-Specific</a:t>
             </a:r>
           </a:p>
@@ -22317,7 +22429,7 @@
               <a:buChar char="-"/>
             </a:pPr>
             <a:r>
-              <a:rPr lang="en-US" dirty="0"/>
+              <a:rPr lang="en-US"/>
               <a:t>Manages ETL Process</a:t>
             </a:r>
           </a:p>
@@ -22327,7 +22439,7 @@
               <a:buChar char="-"/>
             </a:pPr>
             <a:r>
-              <a:rPr lang="en-US" dirty="0"/>
+              <a:rPr lang="en-US"/>
               <a:t>Utilizes MySQL and PySpark connections</a:t>
             </a:r>
           </a:p>
@@ -23333,7 +23445,7 @@
           <a:lstStyle/>
           <a:p>
             <a:pPr algn="ctr"/>
-            <a:endParaRPr lang="en-US" dirty="0"/>
+            <a:endParaRPr lang="en-US"/>
           </a:p>
         </p:txBody>
       </p:sp>
@@ -23367,7 +23479,7 @@
           <a:p>
             <a:pPr algn="ctr"/>
             <a:r>
-              <a:rPr lang="en-US" sz="4400" b="1" dirty="0">
+              <a:rPr lang="en-US" sz="4400" b="1">
                 <a:solidFill>
                   <a:schemeClr val="bg1"/>
                 </a:solidFill>
@@ -23504,7 +23616,7 @@
           <a:p>
             <a:pPr algn="ctr"/>
             <a:r>
-              <a:rPr lang="en-US" dirty="0">
+              <a:rPr lang="en-US">
                 <a:effectLst>
                   <a:outerShdw blurRad="50800" dist="38100" dir="2700000" algn="tl" rotWithShape="0">
                     <a:prstClr val="black">
@@ -23517,7 +23629,7 @@
               <a:t>cli.py </a:t>
             </a:r>
             <a:r>
-              <a:rPr lang="en-US" b="1" dirty="0">
+              <a:rPr lang="en-US" b="1">
                 <a:effectLst>
                   <a:outerShdw blurRad="50800" dist="38100" dir="2700000" algn="tl" rotWithShape="0">
                     <a:prstClr val="black">
@@ -23611,7 +23723,7 @@
           <a:p>
             <a:pPr algn="ctr"/>
             <a:r>
-              <a:rPr lang="en-US" dirty="0">
+              <a:rPr lang="en-US">
                 <a:effectLst>
                   <a:outerShdw blurRad="50800" dist="38100" dir="2700000" algn="tl" rotWithShape="0">
                     <a:prstClr val="black">
@@ -23624,7 +23736,7 @@
               <a:t>menu.py</a:t>
             </a:r>
             <a:r>
-              <a:rPr lang="en-US" b="1" dirty="0">
+              <a:rPr lang="en-US" b="1">
                 <a:effectLst>
                   <a:outerShdw blurRad="50800" dist="38100" dir="2700000" algn="tl" rotWithShape="0">
                     <a:prstClr val="black">
@@ -23672,7 +23784,7 @@
               <a:buChar char="-"/>
             </a:pPr>
             <a:r>
-              <a:rPr lang="en-US" dirty="0"/>
+              <a:rPr lang="en-US"/>
               <a:t>General-Purpose</a:t>
             </a:r>
           </a:p>
@@ -23682,7 +23794,7 @@
               <a:buChar char="-"/>
             </a:pPr>
             <a:r>
-              <a:rPr lang="en-US" dirty="0"/>
+              <a:rPr lang="en-US"/>
               <a:t>CLI Tool-Box</a:t>
             </a:r>
           </a:p>
@@ -23692,7 +23804,7 @@
               <a:buChar char="-"/>
             </a:pPr>
             <a:r>
-              <a:rPr lang="en-US" dirty="0"/>
+              <a:rPr lang="en-US"/>
               <a:t>Simple</a:t>
             </a:r>
           </a:p>
@@ -23731,7 +23843,7 @@
               <a:buChar char="-"/>
             </a:pPr>
             <a:r>
-              <a:rPr lang="en-US" dirty="0"/>
+              <a:rPr lang="en-US"/>
               <a:t>Application-Specific</a:t>
             </a:r>
           </a:p>
@@ -23741,7 +23853,7 @@
               <a:buChar char="-"/>
             </a:pPr>
             <a:r>
-              <a:rPr lang="en-US" dirty="0"/>
+              <a:rPr lang="en-US"/>
               <a:t>User-friendly</a:t>
             </a:r>
           </a:p>
@@ -23751,7 +23863,7 @@
               <a:buChar char="-"/>
             </a:pPr>
             <a:r>
-              <a:rPr lang="en-US" dirty="0"/>
+              <a:rPr lang="en-US"/>
               <a:t>Intuitive</a:t>
             </a:r>
           </a:p>
@@ -24604,7 +24716,7 @@
           <a:lstStyle/>
           <a:p>
             <a:pPr algn="ctr"/>
-            <a:endParaRPr lang="en-US" dirty="0"/>
+            <a:endParaRPr lang="en-US"/>
           </a:p>
         </p:txBody>
       </p:sp>
@@ -24755,7 +24867,7 @@
           <a:lstStyle/>
           <a:p>
             <a:pPr algn="ctr"/>
-            <a:endParaRPr lang="en-US" dirty="0"/>
+            <a:endParaRPr lang="en-US"/>
           </a:p>
         </p:txBody>
       </p:sp>
@@ -24928,7 +25040,7 @@
           <a:lstStyle/>
           <a:p>
             <a:pPr algn="ctr"/>
-            <a:endParaRPr lang="en-US" dirty="0"/>
+            <a:endParaRPr lang="en-US"/>
           </a:p>
         </p:txBody>
       </p:sp>
@@ -24961,7 +25073,7 @@
           <a:lstStyle/>
           <a:p>
             <a:r>
-              <a:rPr lang="en-US" sz="4000" kern="1200" dirty="0">
+              <a:rPr lang="en-US" sz="4000" kern="1200">
                 <a:solidFill>
                   <a:srgbClr val="FFFFFF"/>
                 </a:solidFill>
@@ -25003,7 +25115,7 @@
           <a:lstStyle/>
           <a:p>
             <a:r>
-              <a:rPr lang="en-US" sz="1400" dirty="0">
+              <a:rPr lang="en-US" sz="1400">
                 <a:solidFill>
                   <a:schemeClr val="bg1"/>
                 </a:solidFill>
@@ -25043,7 +25155,7 @@
           <a:p>
             <a:pPr algn="ctr"/>
             <a:r>
-              <a:rPr lang="en-US" dirty="0">
+              <a:rPr lang="en-US">
                 <a:effectLst>
                   <a:outerShdw blurRad="50800" dist="38100" dir="2700000" algn="tl" rotWithShape="0">
                     <a:prstClr val="black">
@@ -25056,7 +25168,7 @@
               <a:t>main.py </a:t>
             </a:r>
             <a:r>
-              <a:rPr lang="en-US" b="1" dirty="0">
+              <a:rPr lang="en-US" b="1">
                 <a:effectLst>
                   <a:outerShdw blurRad="50800" dist="38100" dir="2700000" algn="tl" rotWithShape="0">
                     <a:prstClr val="black">
@@ -25107,7 +25219,7 @@
               <a:buChar char="-"/>
             </a:pPr>
             <a:r>
-              <a:rPr lang="en-US" dirty="0">
+              <a:rPr lang="en-US">
                 <a:solidFill>
                   <a:schemeClr val="bg1"/>
                 </a:solidFill>
@@ -25153,7 +25265,7 @@
               <a:buChar char="-"/>
             </a:pPr>
             <a:r>
-              <a:rPr lang="en-US" dirty="0">
+              <a:rPr lang="en-US">
                 <a:solidFill>
                   <a:schemeClr val="bg1"/>
                 </a:solidFill>
@@ -25161,7 +25273,7 @@
               <a:t>Initializes and Configures </a:t>
             </a:r>
             <a:r>
-              <a:rPr lang="en-US" b="1" dirty="0">
+              <a:rPr lang="en-US" b="1">
                 <a:solidFill>
                   <a:schemeClr val="bg1"/>
                 </a:solidFill>
@@ -25169,7 +25281,7 @@
               <a:t>SparkSession 	     </a:t>
             </a:r>
             <a:r>
-              <a:rPr lang="en-US" dirty="0">
+              <a:rPr lang="en-US">
                 <a:solidFill>
                   <a:schemeClr val="bg1"/>
                 </a:solidFill>
@@ -25177,7 +25289,7 @@
               <a:t>(Connection to </a:t>
             </a:r>
             <a:r>
-              <a:rPr lang="en-US" u="sng" dirty="0">
+              <a:rPr lang="en-US" u="sng">
                 <a:solidFill>
                   <a:schemeClr val="bg1"/>
                 </a:solidFill>
@@ -25185,7 +25297,7 @@
               <a:t>PySpark</a:t>
             </a:r>
             <a:r>
-              <a:rPr lang="en-US" dirty="0">
+              <a:rPr lang="en-US">
                 <a:solidFill>
                   <a:schemeClr val="bg1"/>
                 </a:solidFill>
@@ -25231,7 +25343,7 @@
               <a:buChar char="-"/>
             </a:pPr>
             <a:r>
-              <a:rPr lang="en-US" dirty="0">
+              <a:rPr lang="en-US">
                 <a:solidFill>
                   <a:schemeClr val="bg1"/>
                 </a:solidFill>
@@ -25239,7 +25351,7 @@
               <a:t>Creates </a:t>
             </a:r>
             <a:r>
-              <a:rPr lang="en-US" b="1" dirty="0">
+              <a:rPr lang="en-US" b="1">
                 <a:solidFill>
                   <a:schemeClr val="bg1"/>
                 </a:solidFill>
@@ -25247,7 +25359,7 @@
               <a:t>SafeSQL</a:t>
             </a:r>
             <a:r>
-              <a:rPr lang="en-US" dirty="0">
+              <a:rPr lang="en-US">
                 <a:solidFill>
                   <a:schemeClr val="bg1"/>
                 </a:solidFill>
@@ -25255,7 +25367,7 @@
               <a:t> Connection (</a:t>
             </a:r>
             <a:r>
-              <a:rPr lang="en-US" u="sng" dirty="0">
+              <a:rPr lang="en-US" u="sng">
                 <a:solidFill>
                   <a:schemeClr val="bg1"/>
                 </a:solidFill>
@@ -25263,7 +25375,7 @@
               <a:t>Database Connector </a:t>
             </a:r>
             <a:r>
-              <a:rPr lang="en-US" dirty="0">
+              <a:rPr lang="en-US">
                 <a:solidFill>
                   <a:schemeClr val="bg1"/>
                 </a:solidFill>
@@ -25309,7 +25421,7 @@
               <a:buChar char="-"/>
             </a:pPr>
             <a:r>
-              <a:rPr lang="en-US" dirty="0">
+              <a:rPr lang="en-US">
                 <a:solidFill>
                   <a:schemeClr val="bg1"/>
                 </a:solidFill>
@@ -25317,7 +25429,7 @@
               <a:t>Instantiates </a:t>
             </a:r>
             <a:r>
-              <a:rPr lang="en-US" b="1" dirty="0">
+              <a:rPr lang="en-US" b="1">
                 <a:solidFill>
                   <a:schemeClr val="bg1"/>
                 </a:solidFill>
@@ -25325,7 +25437,7 @@
               <a:t>Data Client</a:t>
             </a:r>
             <a:r>
-              <a:rPr lang="en-US" dirty="0">
+              <a:rPr lang="en-US">
                 <a:solidFill>
                   <a:schemeClr val="bg1"/>
                 </a:solidFill>
@@ -25333,7 +25445,7 @@
               <a:t> and runs </a:t>
             </a:r>
             <a:r>
-              <a:rPr lang="en-US" u="sng" dirty="0">
+              <a:rPr lang="en-US" u="sng">
                 <a:solidFill>
                   <a:schemeClr val="bg1"/>
                 </a:solidFill>
@@ -25379,7 +25491,7 @@
               <a:buChar char="-"/>
             </a:pPr>
             <a:r>
-              <a:rPr lang="en-US" dirty="0">
+              <a:rPr lang="en-US">
                 <a:solidFill>
                   <a:schemeClr val="bg1"/>
                 </a:solidFill>
@@ -25387,7 +25499,7 @@
               <a:t>Instantiates and runs </a:t>
             </a:r>
             <a:r>
-              <a:rPr lang="en-US" b="1" dirty="0">
+              <a:rPr lang="en-US" b="1">
                 <a:solidFill>
                   <a:schemeClr val="bg1"/>
                 </a:solidFill>
@@ -26044,7 +26156,7 @@
           <a:lstStyle/>
           <a:p>
             <a:pPr algn="ctr"/>
-            <a:endParaRPr lang="en-US" dirty="0"/>
+            <a:endParaRPr lang="en-US"/>
           </a:p>
         </p:txBody>
       </p:sp>
@@ -26087,6 +26199,132 @@
           </a:p>
         </p:txBody>
       </p:sp>
+      <p:sp>
+        <p:nvSpPr>
+          <p:cNvPr id="3" name="Rectangle 2">
+            <a:extLst>
+              <a:ext uri="{FF2B5EF4-FFF2-40B4-BE49-F238E27FC236}">
+                <a16:creationId xmlns:a16="http://schemas.microsoft.com/office/drawing/2014/main" id="{51045CD4-8996-A378-16A4-F0DF732F3DEB}"/>
+              </a:ext>
+            </a:extLst>
+          </p:cNvPr>
+          <p:cNvSpPr/>
+          <p:nvPr/>
+        </p:nvSpPr>
+        <p:spPr>
+          <a:xfrm>
+            <a:off x="682605" y="2114782"/>
+            <a:ext cx="5413395" cy="653327"/>
+          </a:xfrm>
+          <a:prstGeom prst="rect">
+            <a:avLst/>
+          </a:prstGeom>
+          <a:solidFill>
+            <a:srgbClr val="114A64">
+              <a:alpha val="40000"/>
+            </a:srgbClr>
+          </a:solidFill>
+          <a:ln>
+            <a:noFill/>
+          </a:ln>
+          <a:effectLst>
+            <a:outerShdw blurRad="44450" dist="27940" dir="5400000" algn="ctr">
+              <a:srgbClr val="000000">
+                <a:alpha val="32000"/>
+              </a:srgbClr>
+            </a:outerShdw>
+          </a:effectLst>
+          <a:scene3d>
+            <a:camera prst="orthographicFront">
+              <a:rot lat="0" lon="0" rev="0"/>
+            </a:camera>
+            <a:lightRig rig="balanced" dir="t">
+              <a:rot lat="0" lon="0" rev="8700000"/>
+            </a:lightRig>
+          </a:scene3d>
+          <a:sp3d>
+            <a:bevelT w="190500" h="38100"/>
+          </a:sp3d>
+        </p:spPr>
+        <p:style>
+          <a:lnRef idx="2">
+            <a:schemeClr val="accent1">
+              <a:shade val="15000"/>
+            </a:schemeClr>
+          </a:lnRef>
+          <a:fillRef idx="1">
+            <a:schemeClr val="accent1"/>
+          </a:fillRef>
+          <a:effectRef idx="0">
+            <a:schemeClr val="accent1"/>
+          </a:effectRef>
+          <a:fontRef idx="minor">
+            <a:schemeClr val="lt1"/>
+          </a:fontRef>
+        </p:style>
+        <p:txBody>
+          <a:bodyPr rtlCol="0" anchor="ctr"/>
+          <a:lstStyle/>
+          <a:p>
+            <a:pPr algn="ctr"/>
+            <a:endParaRPr lang="en-US" dirty="0"/>
+          </a:p>
+        </p:txBody>
+      </p:sp>
+      <p:sp>
+        <p:nvSpPr>
+          <p:cNvPr id="5" name="Rectangle 4">
+            <a:extLst>
+              <a:ext uri="{FF2B5EF4-FFF2-40B4-BE49-F238E27FC236}">
+                <a16:creationId xmlns:a16="http://schemas.microsoft.com/office/drawing/2014/main" id="{4C6CDBE3-0E3D-96FD-9D08-EFF4DAD59F16}"/>
+              </a:ext>
+            </a:extLst>
+          </p:cNvPr>
+          <p:cNvSpPr/>
+          <p:nvPr/>
+        </p:nvSpPr>
+        <p:spPr>
+          <a:xfrm>
+            <a:off x="644055" y="2114782"/>
+            <a:ext cx="10927830" cy="4499875"/>
+          </a:xfrm>
+          <a:prstGeom prst="rect">
+            <a:avLst/>
+          </a:prstGeom>
+          <a:solidFill>
+            <a:srgbClr val="7F7F7F"/>
+          </a:solidFill>
+          <a:ln>
+            <a:solidFill>
+              <a:srgbClr val="7F7F7F"/>
+            </a:solidFill>
+          </a:ln>
+        </p:spPr>
+        <p:style>
+          <a:lnRef idx="2">
+            <a:schemeClr val="accent1">
+              <a:shade val="15000"/>
+            </a:schemeClr>
+          </a:lnRef>
+          <a:fillRef idx="1">
+            <a:schemeClr val="accent1"/>
+          </a:fillRef>
+          <a:effectRef idx="0">
+            <a:schemeClr val="accent1"/>
+          </a:effectRef>
+          <a:fontRef idx="minor">
+            <a:schemeClr val="lt1"/>
+          </a:fontRef>
+        </p:style>
+        <p:txBody>
+          <a:bodyPr rtlCol="0" anchor="ctr"/>
+          <a:lstStyle/>
+          <a:p>
+            <a:pPr algn="ctr"/>
+            <a:endParaRPr lang="en-US"/>
+          </a:p>
+        </p:txBody>
+      </p:sp>
       <p:graphicFrame>
         <p:nvGraphicFramePr>
           <p:cNvPr id="4" name="Content Placeholder 3">
@@ -26103,7 +26341,7 @@
             <p:ph idx="1"/>
             <p:extLst>
               <p:ext uri="{D42A27DB-BD31-4B8C-83A1-F6EECF244321}">
-                <p14:modId xmlns:p14="http://schemas.microsoft.com/office/powerpoint/2010/main" val="3824627342"/>
+                <p14:modId xmlns:p14="http://schemas.microsoft.com/office/powerpoint/2010/main" val="2512131579"/>
               </p:ext>
             </p:extLst>
           </p:nvPr>
@@ -26700,8 +26938,37 @@
                           </a:effectLst>
                           <a:latin typeface="Consolas" panose="020B0609020204030204" pitchFamily="49" charset="0"/>
                         </a:rPr>
-                        <a:t>├── cdw_sapp_branch.json</a:t>
+                        <a:t>├── </a:t>
                       </a:r>
+                      <a:r>
+                        <a:rPr lang="en-US" sz="1700" b="0" dirty="0" err="1">
+                          <a:solidFill>
+                            <a:schemeClr val="tx1"/>
+                          </a:solidFill>
+                          <a:effectLst>
+                            <a:outerShdw blurRad="50800" dist="38100" dir="2700000" algn="tl" rotWithShape="0">
+                              <a:prstClr val="black">
+                                <a:alpha val="40000"/>
+                              </a:prstClr>
+                            </a:outerShdw>
+                          </a:effectLst>
+                          <a:latin typeface="Consolas" panose="020B0609020204030204" pitchFamily="49" charset="0"/>
+                        </a:rPr>
+                        <a:t>cdw_sapp_branch.json</a:t>
+                      </a:r>
+                      <a:endParaRPr lang="en-US" sz="1700" b="0" dirty="0">
+                        <a:solidFill>
+                          <a:schemeClr val="tx1"/>
+                        </a:solidFill>
+                        <a:effectLst>
+                          <a:outerShdw blurRad="50800" dist="38100" dir="2700000" algn="tl" rotWithShape="0">
+                            <a:prstClr val="black">
+                              <a:alpha val="40000"/>
+                            </a:prstClr>
+                          </a:outerShdw>
+                        </a:effectLst>
+                        <a:latin typeface="Consolas" panose="020B0609020204030204" pitchFamily="49" charset="0"/>
+                      </a:endParaRPr>
                     </a:p>
                     <a:p>
                       <a:r>
@@ -26718,8 +26985,37 @@
                           </a:effectLst>
                           <a:latin typeface="Consolas" panose="020B0609020204030204" pitchFamily="49" charset="0"/>
                         </a:rPr>
-                        <a:t>├── cdw_sapp_credit_card.json</a:t>
+                        <a:t>├── </a:t>
                       </a:r>
+                      <a:r>
+                        <a:rPr lang="en-US" sz="1700" b="0" dirty="0" err="1">
+                          <a:solidFill>
+                            <a:schemeClr val="tx1"/>
+                          </a:solidFill>
+                          <a:effectLst>
+                            <a:outerShdw blurRad="50800" dist="38100" dir="2700000" algn="tl" rotWithShape="0">
+                              <a:prstClr val="black">
+                                <a:alpha val="40000"/>
+                              </a:prstClr>
+                            </a:outerShdw>
+                          </a:effectLst>
+                          <a:latin typeface="Consolas" panose="020B0609020204030204" pitchFamily="49" charset="0"/>
+                        </a:rPr>
+                        <a:t>cdw_sapp_credit_card.json</a:t>
+                      </a:r>
+                      <a:endParaRPr lang="en-US" sz="1700" b="0" dirty="0">
+                        <a:solidFill>
+                          <a:schemeClr val="tx1"/>
+                        </a:solidFill>
+                        <a:effectLst>
+                          <a:outerShdw blurRad="50800" dist="38100" dir="2700000" algn="tl" rotWithShape="0">
+                            <a:prstClr val="black">
+                              <a:alpha val="40000"/>
+                            </a:prstClr>
+                          </a:outerShdw>
+                        </a:effectLst>
+                        <a:latin typeface="Consolas" panose="020B0609020204030204" pitchFamily="49" charset="0"/>
+                      </a:endParaRPr>
                     </a:p>
                     <a:p>
                       <a:r>
@@ -26736,8 +27032,37 @@
                           </a:effectLst>
                           <a:latin typeface="Consolas" panose="020B0609020204030204" pitchFamily="49" charset="0"/>
                         </a:rPr>
-                        <a:t>└── cdw_sapp_customer.json</a:t>
+                        <a:t>└── </a:t>
                       </a:r>
+                      <a:r>
+                        <a:rPr lang="en-US" sz="1700" b="0" dirty="0" err="1">
+                          <a:solidFill>
+                            <a:schemeClr val="tx1"/>
+                          </a:solidFill>
+                          <a:effectLst>
+                            <a:outerShdw blurRad="50800" dist="38100" dir="2700000" algn="tl" rotWithShape="0">
+                              <a:prstClr val="black">
+                                <a:alpha val="40000"/>
+                              </a:prstClr>
+                            </a:outerShdw>
+                          </a:effectLst>
+                          <a:latin typeface="Consolas" panose="020B0609020204030204" pitchFamily="49" charset="0"/>
+                        </a:rPr>
+                        <a:t>cdw_sapp_customer.json</a:t>
+                      </a:r>
+                      <a:endParaRPr lang="en-US" sz="1700" b="0" dirty="0">
+                        <a:solidFill>
+                          <a:schemeClr val="tx1"/>
+                        </a:solidFill>
+                        <a:effectLst>
+                          <a:outerShdw blurRad="50800" dist="38100" dir="2700000" algn="tl" rotWithShape="0">
+                            <a:prstClr val="black">
+                              <a:alpha val="40000"/>
+                            </a:prstClr>
+                          </a:outerShdw>
+                        </a:effectLst>
+                        <a:latin typeface="Consolas" panose="020B0609020204030204" pitchFamily="49" charset="0"/>
+                      </a:endParaRPr>
                     </a:p>
                   </a:txBody>
                   <a:tcPr marL="95025" marR="95025" marT="47512" marB="47512">
@@ -26785,12 +27110,7 @@
                       <a:headEnd type="none" w="med" len="med"/>
                       <a:tailEnd type="none" w="med" len="med"/>
                     </a:lnB>
-                    <a:solidFill>
-                      <a:schemeClr val="tx1">
-                        <a:lumMod val="50000"/>
-                        <a:lumOff val="50000"/>
-                      </a:schemeClr>
-                    </a:solidFill>
+                    <a:noFill/>
                   </a:tcPr>
                 </a:tc>
                 <a:tc>
@@ -27940,7 +28260,7 @@
           <a:lstStyle/>
           <a:p>
             <a:pPr algn="ctr"/>
-            <a:endParaRPr lang="en-US" dirty="0"/>
+            <a:endParaRPr lang="en-US"/>
           </a:p>
         </p:txBody>
       </p:sp>
@@ -28110,7 +28430,7 @@
           <a:lstStyle/>
           <a:p>
             <a:pPr algn="ctr"/>
-            <a:endParaRPr lang="en-US" dirty="0"/>
+            <a:endParaRPr lang="en-US"/>
           </a:p>
         </p:txBody>
       </p:sp>
@@ -28237,7 +28557,7 @@
             <a:pPr algn="ctr">
               <a:defRPr/>
             </a:pPr>
-            <a:endParaRPr lang="en-US" sz="2400" b="1" dirty="0">
+            <a:endParaRPr lang="en-US" sz="2400" b="1">
               <a:solidFill>
                 <a:srgbClr val="FFFFFF"/>
               </a:solidFill>
@@ -28249,7 +28569,7 @@
               <a:defRPr/>
             </a:pPr>
             <a:r>
-              <a:rPr lang="en-US" sz="2400" b="1" dirty="0">
+              <a:rPr lang="en-US" sz="2400" b="1">
                 <a:solidFill>
                   <a:srgbClr val="FFFFFF"/>
                 </a:solidFill>
@@ -28262,7 +28582,7 @@
             <a:pPr algn="ctr">
               <a:defRPr/>
             </a:pPr>
-            <a:endParaRPr lang="en-US" sz="2400" b="1" dirty="0">
+            <a:endParaRPr lang="en-US" sz="2400" b="1">
               <a:solidFill>
                 <a:srgbClr val="FFFFFF"/>
               </a:solidFill>
@@ -28288,7 +28608,7 @@
               <a:defRPr/>
             </a:pPr>
             <a:r>
-              <a:rPr kumimoji="0" lang="en-US" sz="1600" b="0" i="0" u="none" strike="noStrike" kern="1200" cap="none" spc="0" normalizeH="0" baseline="0" noProof="0" dirty="0">
+              <a:rPr kumimoji="0" lang="en-US" sz="1600" b="0" i="0" u="none" strike="noStrike" kern="1200" cap="none" spc="0" normalizeH="0" baseline="0" noProof="0">
                 <a:ln>
                   <a:noFill/>
                 </a:ln>
@@ -28323,7 +28643,7 @@
               <a:tabLst/>
               <a:defRPr/>
             </a:pPr>
-            <a:endParaRPr kumimoji="0" lang="en-US" sz="1600" b="0" i="0" u="none" strike="noStrike" kern="1200" cap="none" spc="0" normalizeH="0" baseline="0" noProof="0" dirty="0">
+            <a:endParaRPr kumimoji="0" lang="en-US" sz="1600" b="0" i="0" u="none" strike="noStrike" kern="1200" cap="none" spc="0" normalizeH="0" baseline="0" noProof="0">
               <a:ln>
                 <a:noFill/>
               </a:ln>
@@ -28357,7 +28677,7 @@
               <a:defRPr/>
             </a:pPr>
             <a:r>
-              <a:rPr kumimoji="0" lang="en-US" sz="1600" b="0" u="none" strike="noStrike" kern="1200" cap="none" spc="0" normalizeH="0" baseline="0" noProof="0" dirty="0">
+              <a:rPr kumimoji="0" lang="en-US" sz="1600" b="0" u="none" strike="noStrike" kern="1200" cap="none" spc="0" normalizeH="0" baseline="0" noProof="0">
                 <a:ln>
                   <a:noFill/>
                 </a:ln>
@@ -28393,7 +28713,7 @@
               <a:defRPr/>
             </a:pPr>
             <a:r>
-              <a:rPr lang="en-US" sz="1600" dirty="0">
+              <a:rPr lang="en-US" sz="1600">
                 <a:solidFill>
                   <a:srgbClr val="FFFFFF"/>
                 </a:solidFill>
@@ -28420,7 +28740,7 @@
               <a:tabLst/>
               <a:defRPr/>
             </a:pPr>
-            <a:endParaRPr kumimoji="0" lang="en-US" sz="1600" b="0" i="0" u="none" strike="noStrike" kern="1200" cap="none" spc="0" normalizeH="0" baseline="0" noProof="0" dirty="0">
+            <a:endParaRPr kumimoji="0" lang="en-US" sz="1600" b="0" i="0" u="none" strike="noStrike" kern="1200" cap="none" spc="0" normalizeH="0" baseline="0" noProof="0">
               <a:ln>
                 <a:noFill/>
               </a:ln>
@@ -28528,7 +28848,7 @@
               <a:defRPr/>
             </a:pPr>
             <a:r>
-              <a:rPr lang="en-US" sz="3500" b="1" dirty="0">
+              <a:rPr lang="en-US" sz="3500" b="1">
                 <a:solidFill>
                   <a:srgbClr val="000000"/>
                 </a:solidFill>
@@ -28732,7 +29052,7 @@
                 <a:defRPr/>
               </a:pPr>
               <a:r>
-                <a:rPr lang="en-US" sz="1200" b="1" dirty="0">
+                <a:rPr lang="en-US" sz="1200" b="1">
                   <a:latin typeface="Graphik"/>
                   <a:ea typeface="Calibri"/>
                   <a:cs typeface="Calibri"/>
@@ -28930,7 +29250,7 @@
             <a:p>
               <a:pPr algn="ctr"/>
               <a:r>
-                <a:rPr lang="en-US" sz="1200" b="1" dirty="0">
+                <a:rPr lang="en-US" sz="1200" b="1">
                   <a:latin typeface="Graphik" panose="020B0503030202060203" pitchFamily="34" charset="0"/>
                 </a:rPr>
                 <a:t>github.com/kencopas/Capstone</a:t>
@@ -28990,7 +29310,7 @@
           <a:lstStyle/>
           <a:p>
             <a:pPr algn="ctr"/>
-            <a:endParaRPr lang="en-US" dirty="0"/>
+            <a:endParaRPr lang="en-US"/>
           </a:p>
         </p:txBody>
       </p:sp>
@@ -29040,7 +29360,7 @@
             <a:bodyPr/>
             <a:lstStyle/>
             <a:p>
-              <a:endParaRPr lang="en-US" dirty="0"/>
+              <a:endParaRPr lang="en-US"/>
             </a:p>
           </p:txBody>
         </p:sp>
@@ -29172,34 +29492,34 @@
                 <a:buNone/>
               </a:pPr>
               <a:r>
-                <a:rPr lang="en-US" sz="1800" b="0" kern="1200" dirty="0"/>
+                <a:rPr lang="en-US" sz="1800" b="0" kern="1200"/>
                 <a:t>This project manages an </a:t>
               </a:r>
               <a:r>
-                <a:rPr lang="en-US" sz="1800" b="1" kern="1200" dirty="0"/>
+                <a:rPr lang="en-US" sz="1800" b="1" kern="1200"/>
                 <a:t>ETL Pipeline </a:t>
               </a:r>
               <a:r>
-                <a:rPr lang="en-US" sz="1800" b="0" kern="1200" dirty="0"/>
+                <a:rPr lang="en-US" sz="1800" b="0" kern="1200"/>
                 <a:t>using </a:t>
               </a:r>
               <a:r>
-                <a:rPr lang="en-US" sz="1800" b="1" kern="1200" dirty="0"/>
+                <a:rPr lang="en-US" sz="1800" b="1" kern="1200"/>
                 <a:t>PySpark</a:t>
               </a:r>
               <a:r>
-                <a:rPr lang="en-US" sz="1800" b="0" kern="1200" dirty="0"/>
+                <a:rPr lang="en-US" sz="1800" b="0" kern="1200"/>
                 <a:t> and </a:t>
               </a:r>
               <a:r>
-                <a:rPr lang="en-US" sz="1800" b="1" kern="1200" dirty="0"/>
+                <a:rPr lang="en-US" sz="1800" b="1" kern="1200"/>
                 <a:t>MySQL</a:t>
               </a:r>
               <a:r>
-                <a:rPr lang="en-US" sz="1800" b="0" kern="1200" dirty="0"/>
+                <a:rPr lang="en-US" sz="1800" b="0" kern="1200"/>
                 <a:t>.</a:t>
               </a:r>
-              <a:endParaRPr lang="en-US" sz="1800" kern="1200" dirty="0"/>
+              <a:endParaRPr lang="en-US" sz="1800" kern="1200"/>
             </a:p>
           </p:txBody>
         </p:sp>
@@ -29404,26 +29724,26 @@
                 <a:buNone/>
               </a:pPr>
               <a:r>
-                <a:rPr lang="en-US" sz="1800" b="0" kern="1200" dirty="0"/>
+                <a:rPr lang="en-US" sz="1800" b="0" kern="1200"/>
                 <a:t>The </a:t>
               </a:r>
               <a:r>
-                <a:rPr lang="en-US" sz="1800" b="1" kern="1200" dirty="0"/>
+                <a:rPr lang="en-US" sz="1800" b="1" kern="1200"/>
                 <a:t>Command Line Interface </a:t>
               </a:r>
               <a:r>
-                <a:rPr lang="en-US" sz="1800" b="0" kern="1200" dirty="0"/>
+                <a:rPr lang="en-US" sz="1800" b="0" kern="1200"/>
                 <a:t>provides </a:t>
               </a:r>
               <a:r>
-                <a:rPr lang="en-US" sz="1800" b="1" kern="1200" dirty="0"/>
+                <a:rPr lang="en-US" sz="1800" b="1" kern="1200"/>
                 <a:t>non-technical</a:t>
               </a:r>
               <a:r>
-                <a:rPr lang="en-US" sz="1800" b="0" kern="1200" dirty="0"/>
+                <a:rPr lang="en-US" sz="1800" b="0" kern="1200"/>
                 <a:t> users interaction with the database.</a:t>
               </a:r>
-              <a:endParaRPr lang="en-US" sz="1800" kern="1200" dirty="0"/>
+              <a:endParaRPr lang="en-US" sz="1800" kern="1200"/>
             </a:p>
           </p:txBody>
         </p:sp>
@@ -29623,30 +29943,30 @@
                 <a:buNone/>
               </a:pPr>
               <a:r>
-                <a:rPr lang="en-US" sz="1800" b="1" kern="1200" dirty="0"/>
+                <a:rPr lang="en-US" sz="1800" b="1" kern="1200"/>
                 <a:t>Tableau</a:t>
               </a:r>
               <a:r>
-                <a:rPr lang="en-US" sz="1800" b="0" kern="1200" dirty="0"/>
+                <a:rPr lang="en-US" sz="1800" b="0" kern="1200"/>
                 <a:t> is used for </a:t>
               </a:r>
               <a:r>
-                <a:rPr lang="en-US" sz="1800" b="1" kern="1200" dirty="0"/>
+                <a:rPr lang="en-US" sz="1800" b="1" kern="1200"/>
                 <a:t>Data Analysis and Visualization </a:t>
               </a:r>
               <a:r>
-                <a:rPr lang="en-US" sz="1800" b="0" kern="1200" dirty="0"/>
+                <a:rPr lang="en-US" sz="1800" b="0" kern="1200"/>
                 <a:t>to </a:t>
               </a:r>
               <a:r>
-                <a:rPr lang="en-US" sz="1800" b="1" kern="1200" dirty="0"/>
+                <a:rPr lang="en-US" sz="1800" b="1" kern="1200"/>
                 <a:t>tell a story </a:t>
               </a:r>
               <a:r>
-                <a:rPr lang="en-US" sz="1800" b="0" kern="1200" dirty="0"/>
+                <a:rPr lang="en-US" sz="1800" b="0" kern="1200"/>
                 <a:t>with the data.</a:t>
               </a:r>
-              <a:endParaRPr lang="en-US" sz="1800" kern="1200" dirty="0"/>
+              <a:endParaRPr lang="en-US" sz="1800" kern="1200"/>
             </a:p>
           </p:txBody>
         </p:sp>
@@ -29791,7 +30111,7 @@
                 <a:spcPct val="35000"/>
               </a:spcAft>
             </a:pPr>
-            <a:endParaRPr lang="en-US" sz="2200" b="1" dirty="0"/>
+            <a:endParaRPr lang="en-US" sz="2200" b="1"/>
           </a:p>
         </p:txBody>
       </p:sp>
@@ -29835,7 +30155,7 @@
               </a:spcAft>
             </a:pPr>
             <a:r>
-              <a:rPr lang="en-US" sz="2200" b="1" dirty="0">
+              <a:rPr lang="en-US" sz="2200" b="1">
                 <a:solidFill>
                   <a:schemeClr val="lt1"/>
                 </a:solidFill>
@@ -30261,7 +30581,7 @@
           <a:lstStyle/>
           <a:p>
             <a:pPr algn="ctr"/>
-            <a:endParaRPr lang="en-US" dirty="0"/>
+            <a:endParaRPr lang="en-US"/>
           </a:p>
         </p:txBody>
       </p:sp>
@@ -30431,7 +30751,7 @@
           <a:lstStyle/>
           <a:p>
             <a:pPr algn="ctr"/>
-            <a:endParaRPr lang="en-US" dirty="0"/>
+            <a:endParaRPr lang="en-US"/>
           </a:p>
         </p:txBody>
       </p:sp>
@@ -30544,7 +30864,7 @@
               <a:defRPr/>
             </a:pPr>
             <a:r>
-              <a:rPr lang="en-US" sz="2400" b="1" dirty="0">
+              <a:rPr lang="en-US" sz="2400" b="1">
                 <a:solidFill>
                   <a:srgbClr val="FFFFFF"/>
                 </a:solidFill>
@@ -30557,7 +30877,7 @@
             <a:pPr algn="ctr">
               <a:defRPr/>
             </a:pPr>
-            <a:endParaRPr lang="en-US" sz="2400" b="1" dirty="0">
+            <a:endParaRPr lang="en-US" sz="2400" b="1">
               <a:solidFill>
                 <a:srgbClr val="FFFFFF"/>
               </a:solidFill>
@@ -30583,7 +30903,7 @@
               <a:defRPr/>
             </a:pPr>
             <a:r>
-              <a:rPr kumimoji="0" lang="en-US" sz="1600" b="0" i="0" u="none" strike="noStrike" kern="1200" cap="none" spc="0" normalizeH="0" baseline="0" noProof="0" dirty="0">
+              <a:rPr kumimoji="0" lang="en-US" sz="1600" b="0" i="0" u="none" strike="noStrike" kern="1200" cap="none" spc="0" normalizeH="0" baseline="0" noProof="0">
                 <a:ln>
                   <a:noFill/>
                 </a:ln>
@@ -30618,7 +30938,7 @@
               <a:tabLst/>
               <a:defRPr/>
             </a:pPr>
-            <a:endParaRPr kumimoji="0" lang="en-US" sz="1600" b="0" i="0" u="none" strike="noStrike" kern="1200" cap="none" spc="0" normalizeH="0" baseline="0" noProof="0" dirty="0">
+            <a:endParaRPr kumimoji="0" lang="en-US" sz="1600" b="0" i="0" u="none" strike="noStrike" kern="1200" cap="none" spc="0" normalizeH="0" baseline="0" noProof="0">
               <a:ln>
                 <a:noFill/>
               </a:ln>
@@ -30652,7 +30972,7 @@
               <a:defRPr/>
             </a:pPr>
             <a:r>
-              <a:rPr kumimoji="0" lang="en-US" sz="1600" b="0" i="0" u="none" strike="noStrike" kern="1200" cap="none" spc="0" normalizeH="0" baseline="0" noProof="0" dirty="0">
+              <a:rPr kumimoji="0" lang="en-US" sz="1600" b="0" i="0" u="none" strike="noStrike" kern="1200" cap="none" spc="0" normalizeH="0" baseline="0" noProof="0">
                 <a:ln>
                   <a:noFill/>
                 </a:ln>
@@ -30688,7 +31008,7 @@
               <a:defRPr/>
             </a:pPr>
             <a:r>
-              <a:rPr lang="en-US" sz="1600" dirty="0">
+              <a:rPr lang="en-US" sz="1600">
                 <a:solidFill>
                   <a:srgbClr val="FFFFFF"/>
                 </a:solidFill>
@@ -30696,7 +31016,7 @@
               </a:rPr>
               <a:t>Tampa, FL</a:t>
             </a:r>
-            <a:endParaRPr kumimoji="0" lang="en-US" sz="1600" b="0" i="0" u="none" strike="noStrike" kern="1200" cap="none" spc="0" normalizeH="0" baseline="0" noProof="0" dirty="0">
+            <a:endParaRPr kumimoji="0" lang="en-US" sz="1600" b="0" i="0" u="none" strike="noStrike" kern="1200" cap="none" spc="0" normalizeH="0" baseline="0" noProof="0">
               <a:ln>
                 <a:noFill/>
               </a:ln>
@@ -30729,7 +31049,7 @@
               <a:tabLst/>
               <a:defRPr/>
             </a:pPr>
-            <a:endParaRPr lang="en-US" sz="2400" b="1" dirty="0">
+            <a:endParaRPr lang="en-US" sz="2400" b="1">
               <a:solidFill>
                 <a:srgbClr val="FFFFFF"/>
               </a:solidFill>
@@ -30755,7 +31075,7 @@
               <a:defRPr/>
             </a:pPr>
             <a:r>
-              <a:rPr lang="en-US" sz="1400" b="1" dirty="0">
+              <a:rPr lang="en-US" sz="1400" b="1">
                 <a:solidFill>
                   <a:srgbClr val="FFFFFF"/>
                 </a:solidFill>
@@ -30765,7 +31085,7 @@
               </a:rPr>
               <a:t>linkedin.com/in/kennycopas</a:t>
             </a:r>
-            <a:endParaRPr lang="en-US" sz="1400" i="0" strike="noStrike" kern="1200" cap="none" spc="0" normalizeH="0" baseline="0" noProof="0" dirty="0">
+            <a:endParaRPr lang="en-US" sz="1400" i="0" strike="noStrike" kern="1200" cap="none" spc="0" normalizeH="0" baseline="0" noProof="0">
               <a:ln>
                 <a:noFill/>
               </a:ln>
@@ -30831,12 +31151,12 @@
           <a:p>
             <a:pPr algn="ctr"/>
             <a:r>
-              <a:rPr lang="en-US" dirty="0">
+              <a:rPr lang="en-US">
                 <a:sym typeface="Wingdings" panose="05000000000000000000" pitchFamily="2" charset="2"/>
               </a:rPr>
               <a:t>:)</a:t>
             </a:r>
-            <a:endParaRPr lang="en-US" dirty="0"/>
+            <a:endParaRPr lang="en-US"/>
           </a:p>
         </p:txBody>
       </p:sp>
@@ -30938,7 +31258,7 @@
               <a:defRPr/>
             </a:pPr>
             <a:r>
-              <a:rPr lang="en-US" sz="2600" b="1" dirty="0">
+              <a:rPr lang="en-US" sz="2600" b="1">
                 <a:solidFill>
                   <a:srgbClr val="000000"/>
                 </a:solidFill>
@@ -31291,7 +31611,7 @@
           <a:lstStyle/>
           <a:p>
             <a:pPr algn="ctr"/>
-            <a:endParaRPr lang="en-US" dirty="0"/>
+            <a:endParaRPr lang="en-US"/>
           </a:p>
         </p:txBody>
       </p:sp>
@@ -31325,7 +31645,7 @@
           <a:p>
             <a:pPr algn="ctr"/>
             <a:r>
-              <a:rPr lang="en-US" sz="4000" kern="1200" dirty="0">
+              <a:rPr lang="en-US" sz="4000" kern="1200">
                 <a:solidFill>
                   <a:srgbClr val="FFFFFF"/>
                 </a:solidFill>
@@ -31335,7 +31655,7 @@
               </a:rPr>
               <a:t>What problem is being solved?</a:t>
             </a:r>
-            <a:endParaRPr lang="en-US" sz="4000" dirty="0">
+            <a:endParaRPr lang="en-US" sz="4000">
               <a:solidFill>
                 <a:srgbClr val="FFFFFF"/>
               </a:solidFill>
@@ -31635,7 +31955,7 @@
           <a:lstStyle/>
           <a:p>
             <a:r>
-              <a:rPr lang="en-US" sz="2500" b="1" dirty="0"/>
+              <a:rPr lang="en-US" sz="2500" b="1"/>
               <a:t>Raw file data</a:t>
             </a:r>
           </a:p>
@@ -31645,7 +31965,7 @@
               <a:buChar char="-"/>
             </a:pPr>
             <a:r>
-              <a:rPr lang="en-US" sz="2500" dirty="0"/>
+              <a:rPr lang="en-US" sz="2500"/>
               <a:t>Improperly Formatted</a:t>
             </a:r>
           </a:p>
@@ -31655,7 +31975,7 @@
               <a:buChar char="-"/>
             </a:pPr>
             <a:r>
-              <a:rPr lang="en-US" sz="2500" dirty="0"/>
+              <a:rPr lang="en-US" sz="2500"/>
               <a:t>Local</a:t>
             </a:r>
           </a:p>
@@ -31690,7 +32010,7 @@
           <a:lstStyle/>
           <a:p>
             <a:r>
-              <a:rPr lang="en-US" sz="2500" b="1" dirty="0"/>
+              <a:rPr lang="en-US" sz="2500" b="1"/>
               <a:t>Inaccessible</a:t>
             </a:r>
           </a:p>
@@ -31700,7 +32020,7 @@
               <a:buChar char="-"/>
             </a:pPr>
             <a:r>
-              <a:rPr lang="en-US" sz="2500" dirty="0"/>
+              <a:rPr lang="en-US" sz="2500"/>
               <a:t>Accessible to Programmers</a:t>
             </a:r>
           </a:p>
@@ -31735,7 +32055,7 @@
           <a:lstStyle/>
           <a:p>
             <a:r>
-              <a:rPr lang="en-US" sz="2500" b="1" dirty="0"/>
+              <a:rPr lang="en-US" sz="2500" b="1"/>
               <a:t>Non-visual</a:t>
             </a:r>
           </a:p>
@@ -31745,7 +32065,7 @@
               <a:buChar char="-"/>
             </a:pPr>
             <a:r>
-              <a:rPr lang="en-US" sz="2500" dirty="0"/>
+              <a:rPr lang="en-US" sz="2500"/>
               <a:t>Difficult to Analyze</a:t>
             </a:r>
           </a:p>
@@ -31755,12 +32075,12 @@
               <a:buChar char="-"/>
             </a:pPr>
             <a:r>
-              <a:rPr lang="en-US" sz="2500" dirty="0"/>
+              <a:rPr lang="en-US" sz="2500"/>
               <a:t>Not Presentable</a:t>
             </a:r>
           </a:p>
           <a:p>
-            <a:endParaRPr lang="en-US" sz="2500" dirty="0"/>
+            <a:endParaRPr lang="en-US" sz="2500"/>
           </a:p>
         </p:txBody>
       </p:sp>
@@ -32457,7 +32777,7 @@
           <a:lstStyle/>
           <a:p>
             <a:pPr algn="ctr"/>
-            <a:endParaRPr lang="en-US" dirty="0"/>
+            <a:endParaRPr lang="en-US"/>
           </a:p>
         </p:txBody>
       </p:sp>
@@ -32491,7 +32811,7 @@
           <a:p>
             <a:pPr algn="ctr"/>
             <a:r>
-              <a:rPr lang="en-US" sz="5000" dirty="0">
+              <a:rPr lang="en-US" sz="5000">
                 <a:solidFill>
                   <a:schemeClr val="bg1"/>
                 </a:solidFill>
@@ -32562,7 +32882,7 @@
           <a:p>
             <a:pPr algn="ctr"/>
             <a:r>
-              <a:rPr lang="en-US" sz="3000" b="1" dirty="0"/>
+              <a:rPr lang="en-US" sz="3000" b="1"/>
               <a:t>Raw file data</a:t>
             </a:r>
           </a:p>
@@ -32598,7 +32918,7 @@
           <a:p>
             <a:pPr algn="ctr"/>
             <a:r>
-              <a:rPr lang="en-US" sz="3000" b="1" dirty="0"/>
+              <a:rPr lang="en-US" sz="3000" b="1"/>
               <a:t>Inaccessible</a:t>
             </a:r>
           </a:p>
@@ -32634,7 +32954,7 @@
           <a:p>
             <a:pPr algn="ctr"/>
             <a:r>
-              <a:rPr lang="en-US" sz="3000" b="1" dirty="0"/>
+              <a:rPr lang="en-US" sz="3000" b="1"/>
               <a:t>Non-visual</a:t>
             </a:r>
           </a:p>
@@ -32786,11 +33106,11 @@
                 <a:buChar char="-"/>
               </a:pPr>
               <a:r>
-                <a:rPr lang="en-US" sz="2000" b="1" kern="1200" dirty="0"/>
+                <a:rPr lang="en-US" sz="2000" b="1" kern="1200"/>
                 <a:t>Formats</a:t>
               </a:r>
               <a:r>
-                <a:rPr lang="en-US" sz="2000" b="0" kern="1200" dirty="0"/>
+                <a:rPr lang="en-US" sz="2000" b="0" kern="1200"/>
                 <a:t> file data</a:t>
               </a:r>
             </a:p>
@@ -32809,11 +33129,11 @@
                 <a:buChar char="-"/>
               </a:pPr>
               <a:r>
-                <a:rPr lang="en-US" sz="2000" b="0" kern="1200" dirty="0"/>
+                <a:rPr lang="en-US" sz="2000" b="0" kern="1200"/>
                 <a:t>Stores </a:t>
               </a:r>
               <a:r>
-                <a:rPr lang="en-US" sz="2000" b="1" kern="1200" dirty="0"/>
+                <a:rPr lang="en-US" sz="2000" b="1" kern="1200"/>
                 <a:t>non-locally</a:t>
               </a:r>
             </a:p>
@@ -33032,10 +33352,10 @@
                 <a:buChar char="-"/>
               </a:pPr>
               <a:r>
-                <a:rPr lang="en-US" sz="2000" b="1" dirty="0"/>
+                <a:rPr lang="en-US" sz="2000" b="1"/>
                 <a:t>User-friendly</a:t>
               </a:r>
-              <a:endParaRPr lang="en-US" sz="2000" b="0" kern="1200" dirty="0"/>
+              <a:endParaRPr lang="en-US" sz="2000" b="0" kern="1200"/>
             </a:p>
             <a:p>
               <a:pPr marL="342900" lvl="0" indent="-342900" algn="l" defTabSz="711200">
@@ -33052,11 +33372,11 @@
                 <a:buChar char="-"/>
               </a:pPr>
               <a:r>
-                <a:rPr lang="en-US" sz="2000" b="0" kern="1200" dirty="0"/>
+                <a:rPr lang="en-US" sz="2000" b="0" kern="1200"/>
                 <a:t>Makes data </a:t>
               </a:r>
               <a:r>
-                <a:rPr lang="en-US" sz="2000" b="1" kern="1200" dirty="0"/>
+                <a:rPr lang="en-US" sz="2000" b="1" kern="1200"/>
                 <a:t>accessible</a:t>
               </a:r>
             </a:p>
@@ -33209,7 +33529,7 @@
                 <a:buChar char="-"/>
               </a:pPr>
               <a:r>
-                <a:rPr lang="en-US" sz="2000" b="1" dirty="0"/>
+                <a:rPr lang="en-US" sz="2000" b="1"/>
                 <a:t>Tells a story</a:t>
               </a:r>
             </a:p>
@@ -33228,11 +33548,11 @@
                 <a:buChar char="-"/>
               </a:pPr>
               <a:r>
-                <a:rPr lang="en-US" sz="2000" b="0" kern="1200" dirty="0"/>
+                <a:rPr lang="en-US" sz="2000" b="0" kern="1200"/>
                 <a:t>Makes data </a:t>
               </a:r>
               <a:r>
-                <a:rPr lang="en-US" sz="2000" b="1" kern="1200" dirty="0"/>
+                <a:rPr lang="en-US" sz="2000" b="1" kern="1200"/>
                 <a:t>Presentable</a:t>
               </a:r>
             </a:p>
@@ -34003,7 +34323,7 @@
           <a:lstStyle/>
           <a:p>
             <a:pPr algn="ctr"/>
-            <a:endParaRPr lang="en-US" dirty="0"/>
+            <a:endParaRPr lang="en-US"/>
           </a:p>
         </p:txBody>
       </p:sp>
@@ -34037,7 +34357,7 @@
           <a:p>
             <a:pPr algn="ctr"/>
             <a:r>
-              <a:rPr lang="en-US" sz="4000" dirty="0">
+              <a:rPr lang="en-US" sz="4000">
                 <a:solidFill>
                   <a:srgbClr val="FFFFFF"/>
                 </a:solidFill>
@@ -34122,7 +34442,7 @@
                     <a:p>
                       <a:pPr algn="ctr"/>
                       <a:r>
-                        <a:rPr lang="en-US" sz="2500" dirty="0">
+                        <a:rPr lang="en-US" sz="2500">
                           <a:effectLst>
                             <a:outerShdw blurRad="50800" dist="38100" dir="5400000" algn="t" rotWithShape="0">
                               <a:prstClr val="black">
@@ -34192,7 +34512,7 @@
                     <a:p>
                       <a:pPr algn="ctr"/>
                       <a:r>
-                        <a:rPr lang="en-US" sz="2500" dirty="0">
+                        <a:rPr lang="en-US" sz="2500">
                           <a:effectLst>
                             <a:outerShdw blurRad="50800" dist="38100" dir="5400000" algn="t" rotWithShape="0">
                               <a:prstClr val="black">
@@ -34262,7 +34582,7 @@
                     <a:p>
                       <a:pPr algn="ctr"/>
                       <a:r>
-                        <a:rPr lang="en-US" sz="2500" dirty="0">
+                        <a:rPr lang="en-US" sz="2500">
                           <a:effectLst>
                             <a:outerShdw blurRad="50800" dist="38100" dir="5400000" algn="t" rotWithShape="0">
                               <a:prstClr val="black">
@@ -34332,7 +34652,7 @@
                     <a:p>
                       <a:pPr algn="ctr"/>
                       <a:r>
-                        <a:rPr lang="en-US" sz="2500" dirty="0">
+                        <a:rPr lang="en-US" sz="2500">
                           <a:effectLst>
                             <a:outerShdw blurRad="50800" dist="38100" dir="5400000" algn="t" rotWithShape="0">
                               <a:prstClr val="black">
@@ -34407,7 +34727,7 @@
                     <a:bodyPr/>
                     <a:lstStyle/>
                     <a:p>
-                      <a:endParaRPr lang="en-US" dirty="0"/>
+                      <a:endParaRPr lang="en-US"/>
                     </a:p>
                   </a:txBody>
                   <a:tcPr>
@@ -34463,7 +34783,7 @@
                     <a:bodyPr/>
                     <a:lstStyle/>
                     <a:p>
-                      <a:endParaRPr lang="en-US" dirty="0"/>
+                      <a:endParaRPr lang="en-US"/>
                     </a:p>
                   </a:txBody>
                   <a:tcPr>
@@ -34519,7 +34839,7 @@
                     <a:bodyPr/>
                     <a:lstStyle/>
                     <a:p>
-                      <a:endParaRPr lang="en-US" dirty="0"/>
+                      <a:endParaRPr lang="en-US"/>
                     </a:p>
                   </a:txBody>
                   <a:tcPr>
@@ -34575,7 +34895,7 @@
                     <a:bodyPr/>
                     <a:lstStyle/>
                     <a:p>
-                      <a:endParaRPr lang="en-US" dirty="0"/>
+                      <a:endParaRPr lang="en-US"/>
                     </a:p>
                   </a:txBody>
                   <a:tcPr>
@@ -35008,7 +35328,7 @@
           <a:lstStyle/>
           <a:p>
             <a:pPr algn="ctr"/>
-            <a:endParaRPr lang="en-US" dirty="0"/>
+            <a:endParaRPr lang="en-US"/>
           </a:p>
         </p:txBody>
       </p:sp>
@@ -35159,7 +35479,7 @@
           <a:lstStyle/>
           <a:p>
             <a:pPr algn="ctr"/>
-            <a:endParaRPr lang="en-US" dirty="0"/>
+            <a:endParaRPr lang="en-US"/>
           </a:p>
         </p:txBody>
       </p:sp>
@@ -35332,7 +35652,7 @@
           <a:lstStyle/>
           <a:p>
             <a:pPr algn="ctr"/>
-            <a:endParaRPr lang="en-US" dirty="0"/>
+            <a:endParaRPr lang="en-US"/>
           </a:p>
         </p:txBody>
       </p:sp>
@@ -35366,7 +35686,7 @@
           <a:p>
             <a:pPr algn="ctr"/>
             <a:r>
-              <a:rPr lang="en-US" sz="4000" kern="1200" dirty="0">
+              <a:rPr lang="en-US" sz="4000" kern="1200">
                 <a:solidFill>
                   <a:srgbClr val="FFFFFF"/>
                 </a:solidFill>
@@ -35444,7 +35764,7 @@
           <a:lstStyle/>
           <a:p>
             <a:r>
-              <a:rPr lang="en-US" b="1" dirty="0">
+              <a:rPr lang="en-US" b="1">
                 <a:solidFill>
                   <a:schemeClr val="bg1"/>
                 </a:solidFill>
@@ -35458,7 +35778,7 @@
               <a:buChar char="-"/>
             </a:pPr>
             <a:r>
-              <a:rPr lang="en-US" sz="1600" dirty="0">
+              <a:rPr lang="en-US" sz="1600">
                 <a:solidFill>
                   <a:schemeClr val="bg1"/>
                 </a:solidFill>
@@ -35472,7 +35792,7 @@
               <a:buChar char="-"/>
             </a:pPr>
             <a:r>
-              <a:rPr lang="en-US" sz="1600" dirty="0">
+              <a:rPr lang="en-US" sz="1600">
                 <a:solidFill>
                   <a:schemeClr val="bg1"/>
                 </a:solidFill>
@@ -35485,7 +35805,7 @@
               <a:buFontTx/>
               <a:buChar char="-"/>
             </a:pPr>
-            <a:endParaRPr lang="en-US" sz="1600" dirty="0">
+            <a:endParaRPr lang="en-US" sz="1600">
               <a:solidFill>
                 <a:schemeClr val="bg1"/>
               </a:solidFill>
@@ -35493,7 +35813,7 @@
           </a:p>
           <a:p>
             <a:r>
-              <a:rPr lang="en-US" b="1" dirty="0">
+              <a:rPr lang="en-US" b="1">
                 <a:solidFill>
                   <a:schemeClr val="bg1"/>
                 </a:solidFill>
@@ -35507,7 +35827,7 @@
               <a:buChar char="-"/>
             </a:pPr>
             <a:r>
-              <a:rPr lang="en-US" sz="1600" dirty="0">
+              <a:rPr lang="en-US" sz="1600">
                 <a:solidFill>
                   <a:schemeClr val="bg1"/>
                 </a:solidFill>
@@ -35521,7 +35841,7 @@
               <a:buChar char="-"/>
             </a:pPr>
             <a:r>
-              <a:rPr lang="en-US" sz="1600" dirty="0">
+              <a:rPr lang="en-US" sz="1600">
                 <a:solidFill>
                   <a:schemeClr val="bg1"/>
                 </a:solidFill>
@@ -35530,7 +35850,7 @@
             </a:r>
           </a:p>
           <a:p>
-            <a:endParaRPr lang="en-US" b="1" dirty="0">
+            <a:endParaRPr lang="en-US" b="1">
               <a:solidFill>
                 <a:schemeClr val="bg1"/>
               </a:solidFill>
@@ -35567,11 +35887,11 @@
           <a:lstStyle/>
           <a:p>
             <a:r>
-              <a:rPr lang="en-US" b="1" dirty="0"/>
+              <a:rPr lang="en-US" b="1"/>
               <a:t>E</a:t>
             </a:r>
             <a:r>
-              <a:rPr lang="en-US" dirty="0"/>
+              <a:rPr lang="en-US"/>
               <a:t>xtract</a:t>
             </a:r>
           </a:p>
@@ -35606,11 +35926,11 @@
           <a:lstStyle/>
           <a:p>
             <a:r>
-              <a:rPr lang="en-US" b="1" dirty="0"/>
+              <a:rPr lang="en-US" b="1"/>
               <a:t>T</a:t>
             </a:r>
             <a:r>
-              <a:rPr lang="en-US" dirty="0"/>
+              <a:rPr lang="en-US"/>
               <a:t>ransform</a:t>
             </a:r>
           </a:p>
@@ -35645,11 +35965,11 @@
           <a:lstStyle/>
           <a:p>
             <a:r>
-              <a:rPr lang="en-US" b="1" dirty="0"/>
+              <a:rPr lang="en-US" b="1"/>
               <a:t>L</a:t>
             </a:r>
             <a:r>
-              <a:rPr lang="en-US" dirty="0"/>
+              <a:rPr lang="en-US"/>
               <a:t>oad</a:t>
             </a:r>
           </a:p>
@@ -35844,7 +36164,7 @@
           <a:lstStyle/>
           <a:p>
             <a:pPr algn="ctr"/>
-            <a:endParaRPr lang="en-US" dirty="0"/>
+            <a:endParaRPr lang="en-US"/>
           </a:p>
         </p:txBody>
       </p:sp>
@@ -35995,7 +36315,7 @@
           <a:lstStyle/>
           <a:p>
             <a:pPr algn="ctr"/>
-            <a:endParaRPr lang="en-US" dirty="0"/>
+            <a:endParaRPr lang="en-US"/>
           </a:p>
         </p:txBody>
       </p:sp>
@@ -36168,7 +36488,7 @@
           <a:lstStyle/>
           <a:p>
             <a:pPr algn="ctr"/>
-            <a:endParaRPr lang="en-US" dirty="0"/>
+            <a:endParaRPr lang="en-US"/>
           </a:p>
         </p:txBody>
       </p:sp>
@@ -36238,14 +36558,14 @@
           <a:p>
             <a:pPr algn="ctr"/>
             <a:r>
-              <a:rPr lang="en-US" sz="4000" dirty="0">
+              <a:rPr lang="en-US" sz="4000">
                 <a:solidFill>
                   <a:srgbClr val="FFFFFF"/>
                 </a:solidFill>
               </a:rPr>
               <a:t>Command Line Interface</a:t>
             </a:r>
-            <a:endParaRPr lang="en-US" sz="4000" kern="1200" dirty="0">
+            <a:endParaRPr lang="en-US" sz="4000" kern="1200">
               <a:solidFill>
                 <a:srgbClr val="FFFFFF"/>
               </a:solidFill>
@@ -36285,7 +36605,7 @@
           <a:lstStyle/>
           <a:p>
             <a:r>
-              <a:rPr lang="en-US" b="1" dirty="0">
+              <a:rPr lang="en-US" b="1">
                 <a:solidFill>
                   <a:schemeClr val="bg1"/>
                 </a:solidFill>
@@ -36299,7 +36619,7 @@
               <a:buChar char="-"/>
             </a:pPr>
             <a:r>
-              <a:rPr lang="en-US" sz="1600" dirty="0">
+              <a:rPr lang="en-US" sz="1600">
                 <a:solidFill>
                   <a:schemeClr val="bg1"/>
                 </a:solidFill>
@@ -36313,7 +36633,7 @@
               <a:buChar char="-"/>
             </a:pPr>
             <a:r>
-              <a:rPr lang="en-US" sz="1600" dirty="0">
+              <a:rPr lang="en-US" sz="1600">
                 <a:solidFill>
                   <a:schemeClr val="bg1"/>
                 </a:solidFill>
@@ -36322,7 +36642,7 @@
             </a:r>
           </a:p>
           <a:p>
-            <a:endParaRPr lang="en-US" sz="1600" dirty="0">
+            <a:endParaRPr lang="en-US" sz="1600">
               <a:solidFill>
                 <a:schemeClr val="bg1"/>
               </a:solidFill>
@@ -36330,7 +36650,7 @@
           </a:p>
           <a:p>
             <a:r>
-              <a:rPr lang="en-US" sz="1600" b="1" dirty="0">
+              <a:rPr lang="en-US" sz="1600" b="1">
                 <a:solidFill>
                   <a:schemeClr val="bg1"/>
                 </a:solidFill>
@@ -36344,7 +36664,7 @@
               <a:buChar char="-"/>
             </a:pPr>
             <a:r>
-              <a:rPr lang="en-US" sz="1600" dirty="0">
+              <a:rPr lang="en-US" sz="1600">
                 <a:solidFill>
                   <a:schemeClr val="bg1"/>
                 </a:solidFill>
@@ -36358,7 +36678,7 @@
               <a:buChar char="-"/>
             </a:pPr>
             <a:r>
-              <a:rPr lang="en-US" sz="1600" dirty="0">
+              <a:rPr lang="en-US" sz="1600">
                 <a:solidFill>
                   <a:schemeClr val="bg1"/>
                 </a:solidFill>
@@ -36397,7 +36717,7 @@
           <a:lstStyle/>
           <a:p>
             <a:r>
-              <a:rPr lang="en-US" dirty="0"/>
+              <a:rPr lang="en-US"/>
               <a:t>Request</a:t>
             </a:r>
           </a:p>
@@ -36432,7 +36752,7 @@
           <a:lstStyle/>
           <a:p>
             <a:r>
-              <a:rPr lang="en-US" dirty="0"/>
+              <a:rPr lang="en-US"/>
               <a:t>Response</a:t>
             </a:r>
           </a:p>
@@ -36467,7 +36787,7 @@
           <a:lstStyle/>
           <a:p>
             <a:r>
-              <a:rPr lang="en-US" dirty="0"/>
+              <a:rPr lang="en-US"/>
               <a:t>Query</a:t>
             </a:r>
           </a:p>
@@ -36502,7 +36822,7 @@
           <a:lstStyle/>
           <a:p>
             <a:r>
-              <a:rPr lang="en-US" dirty="0"/>
+              <a:rPr lang="en-US"/>
               <a:t>Data</a:t>
             </a:r>
           </a:p>
@@ -36950,7 +37270,7 @@
           <a:lstStyle/>
           <a:p>
             <a:pPr algn="ctr"/>
-            <a:endParaRPr lang="en-US" dirty="0"/>
+            <a:endParaRPr lang="en-US"/>
           </a:p>
         </p:txBody>
       </p:sp>
@@ -37366,7 +37686,7 @@
           <a:lstStyle/>
           <a:p>
             <a:pPr algn="ctr"/>
-            <a:endParaRPr lang="en-US" dirty="0"/>
+            <a:endParaRPr lang="en-US"/>
           </a:p>
         </p:txBody>
       </p:sp>
@@ -37448,7 +37768,7 @@
           <a:p>
             <a:pPr algn="ctr"/>
             <a:r>
-              <a:rPr lang="en-US" dirty="0">
+              <a:rPr lang="en-US">
                 <a:effectLst>
                   <a:outerShdw blurRad="50800" dist="38100" dir="2700000" algn="tl" rotWithShape="0">
                     <a:prstClr val="black">
@@ -37461,7 +37781,7 @@
               <a:t>cdw_sapp_customer.json </a:t>
             </a:r>
             <a:r>
-              <a:rPr lang="en-US" b="1" dirty="0">
+              <a:rPr lang="en-US" b="1">
                 <a:effectLst>
                   <a:outerShdw blurRad="50800" dist="38100" dir="2700000" algn="tl" rotWithShape="0">
                     <a:prstClr val="black">
@@ -37556,7 +37876,7 @@
           <a:p>
             <a:pPr algn="ctr"/>
             <a:r>
-              <a:rPr lang="en-US" dirty="0">
+              <a:rPr lang="en-US">
                 <a:effectLst>
                   <a:outerShdw blurRad="50800" dist="38100" dir="2700000" algn="tl" rotWithShape="0">
                     <a:prstClr val="black">
@@ -37569,7 +37889,7 @@
               <a:t>init.sql </a:t>
             </a:r>
             <a:r>
-              <a:rPr lang="en-US" b="1" dirty="0">
+              <a:rPr lang="en-US" b="1">
                 <a:effectLst>
                   <a:outerShdw blurRad="50800" dist="38100" dir="2700000" algn="tl" rotWithShape="0">
                     <a:prstClr val="black">
@@ -37661,7 +37981,7 @@
           <a:p>
             <a:pPr algn="ctr"/>
             <a:r>
-              <a:rPr lang="en-US" sz="4400" b="1" dirty="0">
+              <a:rPr lang="en-US" sz="4400" b="1">
                 <a:solidFill>
                   <a:schemeClr val="bg1"/>
                 </a:solidFill>
@@ -37704,7 +38024,7 @@
               <a:buChar char="-"/>
             </a:pPr>
             <a:r>
-              <a:rPr lang="en-US" dirty="0"/>
+              <a:rPr lang="en-US"/>
               <a:t>Unformatted</a:t>
             </a:r>
           </a:p>
@@ -37714,7 +38034,7 @@
               <a:buChar char="-"/>
             </a:pPr>
             <a:r>
-              <a:rPr lang="en-US" dirty="0"/>
+              <a:rPr lang="en-US"/>
               <a:t>Unsorted</a:t>
             </a:r>
           </a:p>
@@ -37724,7 +38044,7 @@
               <a:buChar char="-"/>
             </a:pPr>
             <a:r>
-              <a:rPr lang="en-US" dirty="0"/>
+              <a:rPr lang="en-US"/>
               <a:t>Cannot be loaded into database</a:t>
             </a:r>
           </a:p>
@@ -37811,7 +38131,7 @@
               <a:buChar char="-"/>
             </a:pPr>
             <a:r>
-              <a:rPr lang="en-US" dirty="0"/>
+              <a:rPr lang="en-US"/>
               <a:t>Initializes Database</a:t>
             </a:r>
           </a:p>
@@ -37821,7 +38141,7 @@
               <a:buChar char="-"/>
             </a:pPr>
             <a:r>
-              <a:rPr lang="en-US" dirty="0"/>
+              <a:rPr lang="en-US"/>
               <a:t>Creates Tables</a:t>
             </a:r>
           </a:p>
@@ -37831,7 +38151,7 @@
               <a:buChar char="-"/>
             </a:pPr>
             <a:r>
-              <a:rPr lang="en-US" dirty="0"/>
+              <a:rPr lang="en-US"/>
               <a:t>Specifies Schema</a:t>
             </a:r>
           </a:p>
@@ -37867,7 +38187,7 @@
           <a:p>
             <a:pPr algn="ctr"/>
             <a:r>
-              <a:rPr lang="en-US" dirty="0">
+              <a:rPr lang="en-US">
                 <a:effectLst>
                   <a:outerShdw blurRad="50800" dist="38100" dir="2700000" algn="tl" rotWithShape="0">
                     <a:prstClr val="black">
@@ -37880,7 +38200,7 @@
               <a:t>MySQL - </a:t>
             </a:r>
             <a:r>
-              <a:rPr lang="en-US" b="1" dirty="0">
+              <a:rPr lang="en-US" b="1">
                 <a:effectLst>
                   <a:outerShdw blurRad="50800" dist="38100" dir="2700000" algn="tl" rotWithShape="0">
                     <a:prstClr val="black">
@@ -37925,7 +38245,7 @@
           <a:p>
             <a:pPr algn="ctr"/>
             <a:r>
-              <a:rPr lang="en-US" dirty="0">
+              <a:rPr lang="en-US">
                 <a:effectLst>
                   <a:outerShdw blurRad="50800" dist="38100" dir="2700000" algn="tl" rotWithShape="0">
                     <a:prstClr val="black">
@@ -37938,7 +38258,7 @@
               <a:t>MySQL – </a:t>
             </a:r>
             <a:r>
-              <a:rPr lang="en-US" b="1" dirty="0">
+              <a:rPr lang="en-US" b="1">
                 <a:effectLst>
                   <a:outerShdw blurRad="50800" dist="38100" dir="2700000" algn="tl" rotWithShape="0">
                     <a:prstClr val="black">
